--- a/docs/pptx/carbo/ritu-carbo-linsubhr-ratio-sideeffect.pptx
+++ b/docs/pptx/carbo/ritu-carbo-linsubhr-ratio-sideeffect.pptx
@@ -2443,7 +2443,7 @@
           </p:nvSpPr>
           <p:spPr>
             <a:xfrm>
-              <a:off x="1427870" y="2073503"/>
+              <a:off x="1428538" y="2073503"/>
               <a:ext cx="0" cy="3649639"/>
             </a:xfrm>
             <a:custGeom>
@@ -2486,7 +2486,7 @@
           </p:nvSpPr>
           <p:spPr>
             <a:xfrm>
-              <a:off x="3243537" y="2073503"/>
+              <a:off x="3243764" y="2073503"/>
               <a:ext cx="0" cy="3649639"/>
             </a:xfrm>
             <a:custGeom>
@@ -2529,7 +2529,7 @@
           </p:nvSpPr>
           <p:spPr>
             <a:xfrm>
-              <a:off x="5059204" y="2073503"/>
+              <a:off x="5058989" y="2073503"/>
               <a:ext cx="0" cy="3649639"/>
             </a:xfrm>
             <a:custGeom>
@@ -2572,7 +2572,7 @@
           </p:nvSpPr>
           <p:spPr>
             <a:xfrm>
-              <a:off x="6874870" y="2073503"/>
+              <a:off x="6874214" y="2073503"/>
               <a:ext cx="0" cy="3649639"/>
             </a:xfrm>
             <a:custGeom>
@@ -2830,7 +2830,7 @@
           </p:nvSpPr>
           <p:spPr>
             <a:xfrm>
-              <a:off x="2335703" y="2073503"/>
+              <a:off x="2336151" y="2073503"/>
               <a:ext cx="0" cy="3649639"/>
             </a:xfrm>
             <a:custGeom>
@@ -2873,7 +2873,7 @@
           </p:nvSpPr>
           <p:spPr>
             <a:xfrm>
-              <a:off x="4151370" y="2073503"/>
+              <a:off x="4151376" y="2073503"/>
               <a:ext cx="0" cy="3649639"/>
             </a:xfrm>
             <a:custGeom>
@@ -2916,7 +2916,7 @@
           </p:nvSpPr>
           <p:spPr>
             <a:xfrm>
-              <a:off x="5967037" y="2073503"/>
+              <a:off x="5966601" y="2073503"/>
               <a:ext cx="0" cy="3649639"/>
             </a:xfrm>
             <a:custGeom>
@@ -2959,7 +2959,7 @@
           </p:nvSpPr>
           <p:spPr>
             <a:xfrm>
-              <a:off x="7782704" y="2073503"/>
+              <a:off x="7781826" y="2073503"/>
               <a:ext cx="0" cy="3649639"/>
             </a:xfrm>
             <a:custGeom>
@@ -3003,536 +3003,533 @@
           <p:spPr>
             <a:xfrm>
               <a:off x="1172049" y="2073503"/>
-              <a:ext cx="7090630" cy="3474862"/>
+              <a:ext cx="7090630" cy="3475790"/>
             </a:xfrm>
             <a:custGeom>
               <a:avLst/>
               <a:pathLst>
-                <a:path w="7090630" h="3474862">
+                <a:path w="7090630" h="3475790">
                   <a:moveTo>
-                    <a:pt x="1814969" y="0"/>
+                    <a:pt x="1876763" y="0"/>
                   </a:moveTo>
                   <a:lnTo>
-                    <a:pt x="1862185" y="183691"/>
-                  </a:lnTo>
-                  <a:lnTo>
-                    <a:pt x="1933808" y="440639"/>
-                  </a:lnTo>
-                  <a:lnTo>
-                    <a:pt x="2005430" y="677582"/>
-                  </a:lnTo>
-                  <a:lnTo>
-                    <a:pt x="2077053" y="896075"/>
-                  </a:lnTo>
-                  <a:lnTo>
-                    <a:pt x="2148675" y="1097556"/>
-                  </a:lnTo>
-                  <a:lnTo>
-                    <a:pt x="2220298" y="1283349"/>
-                  </a:lnTo>
-                  <a:lnTo>
-                    <a:pt x="2291920" y="1454676"/>
-                  </a:lnTo>
-                  <a:lnTo>
-                    <a:pt x="2363543" y="1612663"/>
-                  </a:lnTo>
-                  <a:lnTo>
-                    <a:pt x="2435165" y="1758349"/>
-                  </a:lnTo>
-                  <a:lnTo>
-                    <a:pt x="2506788" y="1892692"/>
-                  </a:lnTo>
-                  <a:lnTo>
-                    <a:pt x="2578410" y="2016575"/>
-                  </a:lnTo>
-                  <a:lnTo>
-                    <a:pt x="2650033" y="2130811"/>
-                  </a:lnTo>
-                  <a:lnTo>
-                    <a:pt x="2721655" y="2236153"/>
-                  </a:lnTo>
-                  <a:lnTo>
-                    <a:pt x="2793278" y="2333293"/>
-                  </a:lnTo>
-                  <a:lnTo>
-                    <a:pt x="2864901" y="2422870"/>
-                  </a:lnTo>
-                  <a:lnTo>
-                    <a:pt x="2936523" y="2505472"/>
-                  </a:lnTo>
-                  <a:lnTo>
-                    <a:pt x="3008146" y="2581642"/>
-                  </a:lnTo>
-                  <a:lnTo>
-                    <a:pt x="3079768" y="2651882"/>
-                  </a:lnTo>
-                  <a:lnTo>
-                    <a:pt x="3151391" y="2641917"/>
-                  </a:lnTo>
-                  <a:lnTo>
-                    <a:pt x="3223013" y="2628900"/>
-                  </a:lnTo>
-                  <a:lnTo>
-                    <a:pt x="3294636" y="2615681"/>
-                  </a:lnTo>
-                  <a:lnTo>
-                    <a:pt x="3366258" y="2602257"/>
-                  </a:lnTo>
-                  <a:lnTo>
-                    <a:pt x="3437881" y="2588626"/>
-                  </a:lnTo>
-                  <a:lnTo>
-                    <a:pt x="3509503" y="2574785"/>
-                  </a:lnTo>
-                  <a:lnTo>
-                    <a:pt x="3581126" y="2560729"/>
-                  </a:lnTo>
-                  <a:lnTo>
-                    <a:pt x="3652748" y="2546456"/>
-                  </a:lnTo>
-                  <a:lnTo>
-                    <a:pt x="3724371" y="2531962"/>
-                  </a:lnTo>
-                  <a:lnTo>
-                    <a:pt x="3795993" y="2517244"/>
-                  </a:lnTo>
-                  <a:lnTo>
-                    <a:pt x="3867616" y="2502298"/>
-                  </a:lnTo>
-                  <a:lnTo>
-                    <a:pt x="3939238" y="2487122"/>
-                  </a:lnTo>
-                  <a:lnTo>
-                    <a:pt x="4010861" y="2471711"/>
-                  </a:lnTo>
-                  <a:lnTo>
-                    <a:pt x="4082483" y="2456061"/>
-                  </a:lnTo>
-                  <a:lnTo>
-                    <a:pt x="4154106" y="2440169"/>
-                  </a:lnTo>
-                  <a:lnTo>
-                    <a:pt x="4225729" y="2424032"/>
-                  </a:lnTo>
-                  <a:lnTo>
-                    <a:pt x="4297351" y="2407645"/>
-                  </a:lnTo>
-                  <a:lnTo>
-                    <a:pt x="4368974" y="2391005"/>
-                  </a:lnTo>
-                  <a:lnTo>
-                    <a:pt x="4440596" y="2374107"/>
-                  </a:lnTo>
-                  <a:lnTo>
-                    <a:pt x="4512219" y="2356948"/>
-                  </a:lnTo>
-                  <a:lnTo>
-                    <a:pt x="4583841" y="2339524"/>
-                  </a:lnTo>
-                  <a:lnTo>
-                    <a:pt x="4655464" y="2321830"/>
-                  </a:lnTo>
-                  <a:lnTo>
-                    <a:pt x="4727086" y="2303863"/>
-                  </a:lnTo>
-                  <a:lnTo>
-                    <a:pt x="4798709" y="2285618"/>
-                  </a:lnTo>
-                  <a:lnTo>
-                    <a:pt x="4870331" y="2267090"/>
-                  </a:lnTo>
-                  <a:lnTo>
-                    <a:pt x="4941954" y="2248276"/>
-                  </a:lnTo>
-                  <a:lnTo>
-                    <a:pt x="5013576" y="2229172"/>
-                  </a:lnTo>
-                  <a:lnTo>
-                    <a:pt x="5085199" y="2209772"/>
-                  </a:lnTo>
-                  <a:lnTo>
-                    <a:pt x="5156821" y="2190071"/>
-                  </a:lnTo>
-                  <a:lnTo>
-                    <a:pt x="5228444" y="2170067"/>
-                  </a:lnTo>
-                  <a:lnTo>
-                    <a:pt x="5300066" y="2149753"/>
-                  </a:lnTo>
-                  <a:lnTo>
-                    <a:pt x="5371689" y="2129124"/>
-                  </a:lnTo>
-                  <a:lnTo>
-                    <a:pt x="5443311" y="2108177"/>
-                  </a:lnTo>
-                  <a:lnTo>
-                    <a:pt x="5514934" y="2086906"/>
-                  </a:lnTo>
-                  <a:lnTo>
-                    <a:pt x="5586557" y="2065306"/>
-                  </a:lnTo>
-                  <a:lnTo>
-                    <a:pt x="5658179" y="2043372"/>
-                  </a:lnTo>
-                  <a:lnTo>
-                    <a:pt x="5729802" y="2021098"/>
-                  </a:lnTo>
-                  <a:lnTo>
-                    <a:pt x="5801424" y="1998481"/>
-                  </a:lnTo>
-                  <a:lnTo>
-                    <a:pt x="5873047" y="1975513"/>
-                  </a:lnTo>
-                  <a:lnTo>
-                    <a:pt x="5944669" y="1952191"/>
-                  </a:lnTo>
-                  <a:lnTo>
-                    <a:pt x="6016292" y="1928507"/>
-                  </a:lnTo>
-                  <a:lnTo>
-                    <a:pt x="6087914" y="1904458"/>
-                  </a:lnTo>
-                  <a:lnTo>
-                    <a:pt x="6159537" y="1880037"/>
-                  </a:lnTo>
-                  <a:lnTo>
-                    <a:pt x="6231159" y="1855238"/>
-                  </a:lnTo>
-                  <a:lnTo>
-                    <a:pt x="6302782" y="1830055"/>
-                  </a:lnTo>
-                  <a:lnTo>
-                    <a:pt x="6374404" y="1804483"/>
-                  </a:lnTo>
-                  <a:lnTo>
-                    <a:pt x="6446027" y="1778516"/>
-                  </a:lnTo>
-                  <a:lnTo>
-                    <a:pt x="6517649" y="1752147"/>
-                  </a:lnTo>
-                  <a:lnTo>
-                    <a:pt x="6589272" y="1725370"/>
-                  </a:lnTo>
-                  <a:lnTo>
-                    <a:pt x="6660894" y="1698180"/>
-                  </a:lnTo>
-                  <a:lnTo>
-                    <a:pt x="6732517" y="1670568"/>
-                  </a:lnTo>
-                  <a:lnTo>
-                    <a:pt x="6804139" y="1642530"/>
-                  </a:lnTo>
-                  <a:lnTo>
-                    <a:pt x="6875762" y="1614059"/>
-                  </a:lnTo>
-                  <a:lnTo>
-                    <a:pt x="6947385" y="1585147"/>
-                  </a:lnTo>
-                  <a:lnTo>
-                    <a:pt x="7019007" y="1555788"/>
-                  </a:lnTo>
-                  <a:lnTo>
-                    <a:pt x="7090630" y="1525975"/>
-                  </a:lnTo>
-                  <a:lnTo>
-                    <a:pt x="7090630" y="3474862"/>
-                  </a:lnTo>
-                  <a:lnTo>
-                    <a:pt x="7019007" y="3474112"/>
-                  </a:lnTo>
-                  <a:lnTo>
-                    <a:pt x="6947385" y="3473298"/>
-                  </a:lnTo>
-                  <a:lnTo>
-                    <a:pt x="6875762" y="3472416"/>
-                  </a:lnTo>
-                  <a:lnTo>
-                    <a:pt x="6804139" y="3471459"/>
-                  </a:lnTo>
-                  <a:lnTo>
-                    <a:pt x="6732517" y="3470422"/>
-                  </a:lnTo>
-                  <a:lnTo>
-                    <a:pt x="6660894" y="3469297"/>
-                  </a:lnTo>
-                  <a:lnTo>
-                    <a:pt x="6589272" y="3468077"/>
-                  </a:lnTo>
-                  <a:lnTo>
-                    <a:pt x="6517649" y="3466754"/>
-                  </a:lnTo>
-                  <a:lnTo>
-                    <a:pt x="6446027" y="3465319"/>
-                  </a:lnTo>
-                  <a:lnTo>
-                    <a:pt x="6374404" y="3463763"/>
-                  </a:lnTo>
-                  <a:lnTo>
-                    <a:pt x="6302782" y="3462076"/>
-                  </a:lnTo>
-                  <a:lnTo>
-                    <a:pt x="6231159" y="3460246"/>
-                  </a:lnTo>
-                  <a:lnTo>
-                    <a:pt x="6159537" y="3458262"/>
-                  </a:lnTo>
-                  <a:lnTo>
-                    <a:pt x="6087914" y="3456110"/>
-                  </a:lnTo>
-                  <a:lnTo>
-                    <a:pt x="6016292" y="3453776"/>
-                  </a:lnTo>
-                  <a:lnTo>
-                    <a:pt x="5944669" y="3451246"/>
-                  </a:lnTo>
-                  <a:lnTo>
-                    <a:pt x="5873047" y="3448502"/>
-                  </a:lnTo>
-                  <a:lnTo>
-                    <a:pt x="5801424" y="3445526"/>
-                  </a:lnTo>
-                  <a:lnTo>
-                    <a:pt x="5729802" y="3442298"/>
-                  </a:lnTo>
-                  <a:lnTo>
-                    <a:pt x="5658179" y="3438799"/>
-                  </a:lnTo>
-                  <a:lnTo>
-                    <a:pt x="5586557" y="3435003"/>
-                  </a:lnTo>
-                  <a:lnTo>
-                    <a:pt x="5514934" y="3430888"/>
-                  </a:lnTo>
-                  <a:lnTo>
-                    <a:pt x="5443311" y="3426425"/>
-                  </a:lnTo>
-                  <a:lnTo>
-                    <a:pt x="5371689" y="3421585"/>
-                  </a:lnTo>
-                  <a:lnTo>
-                    <a:pt x="5300066" y="3416336"/>
-                  </a:lnTo>
-                  <a:lnTo>
-                    <a:pt x="5228444" y="3410644"/>
-                  </a:lnTo>
-                  <a:lnTo>
-                    <a:pt x="5156821" y="3404471"/>
-                  </a:lnTo>
-                  <a:lnTo>
-                    <a:pt x="5085199" y="3397778"/>
-                  </a:lnTo>
-                  <a:lnTo>
-                    <a:pt x="5013576" y="3390519"/>
-                  </a:lnTo>
-                  <a:lnTo>
-                    <a:pt x="4941954" y="3382647"/>
-                  </a:lnTo>
-                  <a:lnTo>
-                    <a:pt x="4870331" y="3374111"/>
-                  </a:lnTo>
-                  <a:lnTo>
-                    <a:pt x="4798709" y="3364853"/>
-                  </a:lnTo>
-                  <a:lnTo>
-                    <a:pt x="4727086" y="3354815"/>
-                  </a:lnTo>
-                  <a:lnTo>
-                    <a:pt x="4655464" y="3343928"/>
-                  </a:lnTo>
-                  <a:lnTo>
-                    <a:pt x="4583841" y="3332122"/>
-                  </a:lnTo>
-                  <a:lnTo>
-                    <a:pt x="4512219" y="3319320"/>
-                  </a:lnTo>
-                  <a:lnTo>
-                    <a:pt x="4440596" y="3305436"/>
-                  </a:lnTo>
-                  <a:lnTo>
-                    <a:pt x="4368974" y="3290380"/>
-                  </a:lnTo>
-                  <a:lnTo>
-                    <a:pt x="4297351" y="3274053"/>
-                  </a:lnTo>
-                  <a:lnTo>
-                    <a:pt x="4225729" y="3256348"/>
-                  </a:lnTo>
-                  <a:lnTo>
-                    <a:pt x="4154106" y="3237147"/>
-                  </a:lnTo>
-                  <a:lnTo>
-                    <a:pt x="4082483" y="3216325"/>
-                  </a:lnTo>
-                  <a:lnTo>
-                    <a:pt x="4010861" y="3193745"/>
-                  </a:lnTo>
-                  <a:lnTo>
-                    <a:pt x="3939238" y="3169258"/>
-                  </a:lnTo>
-                  <a:lnTo>
-                    <a:pt x="3867616" y="3142704"/>
-                  </a:lnTo>
-                  <a:lnTo>
-                    <a:pt x="3795993" y="3113908"/>
-                  </a:lnTo>
-                  <a:lnTo>
-                    <a:pt x="3724371" y="3082680"/>
-                  </a:lnTo>
-                  <a:lnTo>
-                    <a:pt x="3652748" y="3048815"/>
-                  </a:lnTo>
-                  <a:lnTo>
-                    <a:pt x="3581126" y="3012091"/>
-                  </a:lnTo>
-                  <a:lnTo>
-                    <a:pt x="3509503" y="2972266"/>
-                  </a:lnTo>
-                  <a:lnTo>
-                    <a:pt x="3437881" y="2929079"/>
-                  </a:lnTo>
-                  <a:lnTo>
-                    <a:pt x="3366258" y="2882245"/>
-                  </a:lnTo>
-                  <a:lnTo>
-                    <a:pt x="3294636" y="2831456"/>
-                  </a:lnTo>
-                  <a:lnTo>
-                    <a:pt x="3223013" y="2776380"/>
-                  </a:lnTo>
-                  <a:lnTo>
-                    <a:pt x="3151391" y="2716652"/>
-                  </a:lnTo>
-                  <a:lnTo>
-                    <a:pt x="3079768" y="2654737"/>
-                  </a:lnTo>
-                  <a:lnTo>
-                    <a:pt x="3008146" y="2667361"/>
-                  </a:lnTo>
-                  <a:lnTo>
-                    <a:pt x="2936523" y="2679793"/>
-                  </a:lnTo>
-                  <a:lnTo>
-                    <a:pt x="2864901" y="2692035"/>
-                  </a:lnTo>
-                  <a:lnTo>
-                    <a:pt x="2793278" y="2704092"/>
-                  </a:lnTo>
-                  <a:lnTo>
-                    <a:pt x="2721655" y="2715964"/>
-                  </a:lnTo>
-                  <a:lnTo>
-                    <a:pt x="2650033" y="2727656"/>
-                  </a:lnTo>
-                  <a:lnTo>
-                    <a:pt x="2578410" y="2739170"/>
-                  </a:lnTo>
-                  <a:lnTo>
-                    <a:pt x="2506788" y="2750508"/>
-                  </a:lnTo>
-                  <a:lnTo>
-                    <a:pt x="2435165" y="2761674"/>
-                  </a:lnTo>
-                  <a:lnTo>
-                    <a:pt x="2363543" y="2772670"/>
-                  </a:lnTo>
-                  <a:lnTo>
-                    <a:pt x="2291920" y="2783498"/>
-                  </a:lnTo>
-                  <a:lnTo>
-                    <a:pt x="2220298" y="2794162"/>
-                  </a:lnTo>
-                  <a:lnTo>
-                    <a:pt x="2148675" y="2804663"/>
-                  </a:lnTo>
-                  <a:lnTo>
-                    <a:pt x="2077053" y="2815004"/>
-                  </a:lnTo>
-                  <a:lnTo>
-                    <a:pt x="2005430" y="2825187"/>
-                  </a:lnTo>
-                  <a:lnTo>
-                    <a:pt x="1933808" y="2835216"/>
-                  </a:lnTo>
-                  <a:lnTo>
-                    <a:pt x="1862185" y="2845092"/>
-                  </a:lnTo>
-                  <a:lnTo>
-                    <a:pt x="1790563" y="2854817"/>
-                  </a:lnTo>
-                  <a:lnTo>
-                    <a:pt x="1718940" y="2864395"/>
-                  </a:lnTo>
-                  <a:lnTo>
-                    <a:pt x="1647318" y="2873826"/>
-                  </a:lnTo>
-                  <a:lnTo>
-                    <a:pt x="1575695" y="2883114"/>
-                  </a:lnTo>
-                  <a:lnTo>
-                    <a:pt x="1504073" y="2892261"/>
-                  </a:lnTo>
-                  <a:lnTo>
-                    <a:pt x="1432450" y="2901268"/>
-                  </a:lnTo>
-                  <a:lnTo>
-                    <a:pt x="1360827" y="2910138"/>
-                  </a:lnTo>
-                  <a:lnTo>
-                    <a:pt x="1289205" y="2918873"/>
-                  </a:lnTo>
-                  <a:lnTo>
-                    <a:pt x="1217582" y="2927475"/>
-                  </a:lnTo>
-                  <a:lnTo>
-                    <a:pt x="1145960" y="2935945"/>
-                  </a:lnTo>
-                  <a:lnTo>
-                    <a:pt x="1074337" y="2944287"/>
-                  </a:lnTo>
-                  <a:lnTo>
-                    <a:pt x="1002715" y="2952502"/>
-                  </a:lnTo>
-                  <a:lnTo>
-                    <a:pt x="931092" y="2960592"/>
-                  </a:lnTo>
-                  <a:lnTo>
-                    <a:pt x="859470" y="2968559"/>
-                  </a:lnTo>
-                  <a:lnTo>
-                    <a:pt x="787847" y="2976404"/>
-                  </a:lnTo>
-                  <a:lnTo>
-                    <a:pt x="716225" y="2984130"/>
-                  </a:lnTo>
-                  <a:lnTo>
-                    <a:pt x="644602" y="2991738"/>
-                  </a:lnTo>
-                  <a:lnTo>
-                    <a:pt x="572980" y="2999230"/>
-                  </a:lnTo>
-                  <a:lnTo>
-                    <a:pt x="501357" y="3006609"/>
-                  </a:lnTo>
-                  <a:lnTo>
-                    <a:pt x="429735" y="3013875"/>
-                  </a:lnTo>
-                  <a:lnTo>
-                    <a:pt x="358112" y="3021030"/>
-                  </a:lnTo>
-                  <a:lnTo>
-                    <a:pt x="286490" y="3028076"/>
-                  </a:lnTo>
-                  <a:lnTo>
-                    <a:pt x="214867" y="3035015"/>
-                  </a:lnTo>
-                  <a:lnTo>
-                    <a:pt x="143245" y="3041848"/>
-                  </a:lnTo>
-                  <a:lnTo>
-                    <a:pt x="71622" y="3048578"/>
-                  </a:lnTo>
-                  <a:lnTo>
-                    <a:pt x="0" y="3055204"/>
+                    <a:pt x="1933808" y="226061"/>
+                  </a:lnTo>
+                  <a:lnTo>
+                    <a:pt x="2005430" y="487145"/>
+                  </a:lnTo>
+                  <a:lnTo>
+                    <a:pt x="2077053" y="727305"/>
+                  </a:lnTo>
+                  <a:lnTo>
+                    <a:pt x="2148675" y="948218"/>
+                  </a:lnTo>
+                  <a:lnTo>
+                    <a:pt x="2220298" y="1151425"/>
+                  </a:lnTo>
+                  <a:lnTo>
+                    <a:pt x="2291920" y="1338347"/>
+                  </a:lnTo>
+                  <a:lnTo>
+                    <a:pt x="2363543" y="1510288"/>
+                  </a:lnTo>
+                  <a:lnTo>
+                    <a:pt x="2435165" y="1668449"/>
+                  </a:lnTo>
+                  <a:lnTo>
+                    <a:pt x="2506788" y="1813935"/>
+                  </a:lnTo>
+                  <a:lnTo>
+                    <a:pt x="2578410" y="1947760"/>
+                  </a:lnTo>
+                  <a:lnTo>
+                    <a:pt x="2650033" y="2070861"/>
+                  </a:lnTo>
+                  <a:lnTo>
+                    <a:pt x="2721655" y="2184095"/>
+                  </a:lnTo>
+                  <a:lnTo>
+                    <a:pt x="2793278" y="2288254"/>
+                  </a:lnTo>
+                  <a:lnTo>
+                    <a:pt x="2864901" y="2384066"/>
+                  </a:lnTo>
+                  <a:lnTo>
+                    <a:pt x="2936523" y="2472199"/>
+                  </a:lnTo>
+                  <a:lnTo>
+                    <a:pt x="3008146" y="2553269"/>
+                  </a:lnTo>
+                  <a:lnTo>
+                    <a:pt x="3079768" y="2627841"/>
+                  </a:lnTo>
+                  <a:lnTo>
+                    <a:pt x="3151391" y="2646026"/>
+                  </a:lnTo>
+                  <a:lnTo>
+                    <a:pt x="3223013" y="2632629"/>
+                  </a:lnTo>
+                  <a:lnTo>
+                    <a:pt x="3294636" y="2619018"/>
+                  </a:lnTo>
+                  <a:lnTo>
+                    <a:pt x="3366258" y="2605189"/>
+                  </a:lnTo>
+                  <a:lnTo>
+                    <a:pt x="3437881" y="2591139"/>
+                  </a:lnTo>
+                  <a:lnTo>
+                    <a:pt x="3509503" y="2576865"/>
+                  </a:lnTo>
+                  <a:lnTo>
+                    <a:pt x="3581126" y="2562362"/>
+                  </a:lnTo>
+                  <a:lnTo>
+                    <a:pt x="3652748" y="2547627"/>
+                  </a:lnTo>
+                  <a:lnTo>
+                    <a:pt x="3724371" y="2532657"/>
+                  </a:lnTo>
+                  <a:lnTo>
+                    <a:pt x="3795993" y="2517447"/>
+                  </a:lnTo>
+                  <a:lnTo>
+                    <a:pt x="3867616" y="2501994"/>
+                  </a:lnTo>
+                  <a:lnTo>
+                    <a:pt x="3939238" y="2486294"/>
+                  </a:lnTo>
+                  <a:lnTo>
+                    <a:pt x="4010861" y="2470342"/>
+                  </a:lnTo>
+                  <a:lnTo>
+                    <a:pt x="4082483" y="2454136"/>
+                  </a:lnTo>
+                  <a:lnTo>
+                    <a:pt x="4154106" y="2437670"/>
+                  </a:lnTo>
+                  <a:lnTo>
+                    <a:pt x="4225729" y="2420942"/>
+                  </a:lnTo>
+                  <a:lnTo>
+                    <a:pt x="4297351" y="2403945"/>
+                  </a:lnTo>
+                  <a:lnTo>
+                    <a:pt x="4368974" y="2386677"/>
+                  </a:lnTo>
+                  <a:lnTo>
+                    <a:pt x="4440596" y="2369133"/>
+                  </a:lnTo>
+                  <a:lnTo>
+                    <a:pt x="4512219" y="2351308"/>
+                  </a:lnTo>
+                  <a:lnTo>
+                    <a:pt x="4583841" y="2333198"/>
+                  </a:lnTo>
+                  <a:lnTo>
+                    <a:pt x="4655464" y="2314798"/>
+                  </a:lnTo>
+                  <a:lnTo>
+                    <a:pt x="4727086" y="2296105"/>
+                  </a:lnTo>
+                  <a:lnTo>
+                    <a:pt x="4798709" y="2277112"/>
+                  </a:lnTo>
+                  <a:lnTo>
+                    <a:pt x="4870331" y="2257815"/>
+                  </a:lnTo>
+                  <a:lnTo>
+                    <a:pt x="4941954" y="2238210"/>
+                  </a:lnTo>
+                  <a:lnTo>
+                    <a:pt x="5013576" y="2218292"/>
+                  </a:lnTo>
+                  <a:lnTo>
+                    <a:pt x="5085199" y="2198054"/>
+                  </a:lnTo>
+                  <a:lnTo>
+                    <a:pt x="5156821" y="2177494"/>
+                  </a:lnTo>
+                  <a:lnTo>
+                    <a:pt x="5228444" y="2156604"/>
+                  </a:lnTo>
+                  <a:lnTo>
+                    <a:pt x="5300066" y="2135380"/>
+                  </a:lnTo>
+                  <a:lnTo>
+                    <a:pt x="5371689" y="2113817"/>
+                  </a:lnTo>
+                  <a:lnTo>
+                    <a:pt x="5443311" y="2091910"/>
+                  </a:lnTo>
+                  <a:lnTo>
+                    <a:pt x="5514934" y="2069651"/>
+                  </a:lnTo>
+                  <a:lnTo>
+                    <a:pt x="5586557" y="2047037"/>
+                  </a:lnTo>
+                  <a:lnTo>
+                    <a:pt x="5658179" y="2024061"/>
+                  </a:lnTo>
+                  <a:lnTo>
+                    <a:pt x="5729802" y="2000718"/>
+                  </a:lnTo>
+                  <a:lnTo>
+                    <a:pt x="5801424" y="1977001"/>
+                  </a:lnTo>
+                  <a:lnTo>
+                    <a:pt x="5873047" y="1952906"/>
+                  </a:lnTo>
+                  <a:lnTo>
+                    <a:pt x="5944669" y="1928424"/>
+                  </a:lnTo>
+                  <a:lnTo>
+                    <a:pt x="6016292" y="1903552"/>
+                  </a:lnTo>
+                  <a:lnTo>
+                    <a:pt x="6087914" y="1878281"/>
+                  </a:lnTo>
+                  <a:lnTo>
+                    <a:pt x="6159537" y="1852607"/>
+                  </a:lnTo>
+                  <a:lnTo>
+                    <a:pt x="6231159" y="1826521"/>
+                  </a:lnTo>
+                  <a:lnTo>
+                    <a:pt x="6302782" y="1800019"/>
+                  </a:lnTo>
+                  <a:lnTo>
+                    <a:pt x="6374404" y="1773093"/>
+                  </a:lnTo>
+                  <a:lnTo>
+                    <a:pt x="6446027" y="1745736"/>
+                  </a:lnTo>
+                  <a:lnTo>
+                    <a:pt x="6517649" y="1717942"/>
+                  </a:lnTo>
+                  <a:lnTo>
+                    <a:pt x="6589272" y="1689703"/>
+                  </a:lnTo>
+                  <a:lnTo>
+                    <a:pt x="6660894" y="1661013"/>
+                  </a:lnTo>
+                  <a:lnTo>
+                    <a:pt x="6732517" y="1631864"/>
+                  </a:lnTo>
+                  <a:lnTo>
+                    <a:pt x="6804139" y="1602249"/>
+                  </a:lnTo>
+                  <a:lnTo>
+                    <a:pt x="6875762" y="1572160"/>
+                  </a:lnTo>
+                  <a:lnTo>
+                    <a:pt x="6947385" y="1541590"/>
+                  </a:lnTo>
+                  <a:lnTo>
+                    <a:pt x="7019007" y="1510531"/>
+                  </a:lnTo>
+                  <a:lnTo>
+                    <a:pt x="7090630" y="1478975"/>
+                  </a:lnTo>
+                  <a:lnTo>
+                    <a:pt x="7090630" y="3475790"/>
+                  </a:lnTo>
+                  <a:lnTo>
+                    <a:pt x="7019007" y="3475096"/>
+                  </a:lnTo>
+                  <a:lnTo>
+                    <a:pt x="6947385" y="3474343"/>
+                  </a:lnTo>
+                  <a:lnTo>
+                    <a:pt x="6875762" y="3473523"/>
+                  </a:lnTo>
+                  <a:lnTo>
+                    <a:pt x="6804139" y="3472633"/>
+                  </a:lnTo>
+                  <a:lnTo>
+                    <a:pt x="6732517" y="3471665"/>
+                  </a:lnTo>
+                  <a:lnTo>
+                    <a:pt x="6660894" y="3470612"/>
+                  </a:lnTo>
+                  <a:lnTo>
+                    <a:pt x="6589272" y="3469467"/>
+                  </a:lnTo>
+                  <a:lnTo>
+                    <a:pt x="6517649" y="3468223"/>
+                  </a:lnTo>
+                  <a:lnTo>
+                    <a:pt x="6446027" y="3466871"/>
+                  </a:lnTo>
+                  <a:lnTo>
+                    <a:pt x="6374404" y="3465401"/>
+                  </a:lnTo>
+                  <a:lnTo>
+                    <a:pt x="6302782" y="3463802"/>
+                  </a:lnTo>
+                  <a:lnTo>
+                    <a:pt x="6231159" y="3462065"/>
+                  </a:lnTo>
+                  <a:lnTo>
+                    <a:pt x="6159537" y="3460175"/>
+                  </a:lnTo>
+                  <a:lnTo>
+                    <a:pt x="6087914" y="3458122"/>
+                  </a:lnTo>
+                  <a:lnTo>
+                    <a:pt x="6016292" y="3455889"/>
+                  </a:lnTo>
+                  <a:lnTo>
+                    <a:pt x="5944669" y="3453462"/>
+                  </a:lnTo>
+                  <a:lnTo>
+                    <a:pt x="5873047" y="3450824"/>
+                  </a:lnTo>
+                  <a:lnTo>
+                    <a:pt x="5801424" y="3447955"/>
+                  </a:lnTo>
+                  <a:lnTo>
+                    <a:pt x="5729802" y="3444837"/>
+                  </a:lnTo>
+                  <a:lnTo>
+                    <a:pt x="5658179" y="3441447"/>
+                  </a:lnTo>
+                  <a:lnTo>
+                    <a:pt x="5586557" y="3437761"/>
+                  </a:lnTo>
+                  <a:lnTo>
+                    <a:pt x="5514934" y="3433755"/>
+                  </a:lnTo>
+                  <a:lnTo>
+                    <a:pt x="5443311" y="3429399"/>
+                  </a:lnTo>
+                  <a:lnTo>
+                    <a:pt x="5371689" y="3424664"/>
+                  </a:lnTo>
+                  <a:lnTo>
+                    <a:pt x="5300066" y="3419516"/>
+                  </a:lnTo>
+                  <a:lnTo>
+                    <a:pt x="5228444" y="3413920"/>
+                  </a:lnTo>
+                  <a:lnTo>
+                    <a:pt x="5156821" y="3407836"/>
+                  </a:lnTo>
+                  <a:lnTo>
+                    <a:pt x="5085199" y="3401222"/>
+                  </a:lnTo>
+                  <a:lnTo>
+                    <a:pt x="5013576" y="3394032"/>
+                  </a:lnTo>
+                  <a:lnTo>
+                    <a:pt x="4941954" y="3386216"/>
+                  </a:lnTo>
+                  <a:lnTo>
+                    <a:pt x="4870331" y="3377718"/>
+                  </a:lnTo>
+                  <a:lnTo>
+                    <a:pt x="4798709" y="3368481"/>
+                  </a:lnTo>
+                  <a:lnTo>
+                    <a:pt x="4727086" y="3358438"/>
+                  </a:lnTo>
+                  <a:lnTo>
+                    <a:pt x="4655464" y="3347520"/>
+                  </a:lnTo>
+                  <a:lnTo>
+                    <a:pt x="4583841" y="3335651"/>
+                  </a:lnTo>
+                  <a:lnTo>
+                    <a:pt x="4512219" y="3322748"/>
+                  </a:lnTo>
+                  <a:lnTo>
+                    <a:pt x="4440596" y="3308721"/>
+                  </a:lnTo>
+                  <a:lnTo>
+                    <a:pt x="4368974" y="3293471"/>
+                  </a:lnTo>
+                  <a:lnTo>
+                    <a:pt x="4297351" y="3276893"/>
+                  </a:lnTo>
+                  <a:lnTo>
+                    <a:pt x="4225729" y="3258871"/>
+                  </a:lnTo>
+                  <a:lnTo>
+                    <a:pt x="4154106" y="3239278"/>
+                  </a:lnTo>
+                  <a:lnTo>
+                    <a:pt x="4082483" y="3217978"/>
+                  </a:lnTo>
+                  <a:lnTo>
+                    <a:pt x="4010861" y="3194823"/>
+                  </a:lnTo>
+                  <a:lnTo>
+                    <a:pt x="3939238" y="3169650"/>
+                  </a:lnTo>
+                  <a:lnTo>
+                    <a:pt x="3867616" y="3142283"/>
+                  </a:lnTo>
+                  <a:lnTo>
+                    <a:pt x="3795993" y="3112533"/>
+                  </a:lnTo>
+                  <a:lnTo>
+                    <a:pt x="3724371" y="3080190"/>
+                  </a:lnTo>
+                  <a:lnTo>
+                    <a:pt x="3652748" y="3045030"/>
+                  </a:lnTo>
+                  <a:lnTo>
+                    <a:pt x="3581126" y="3006806"/>
+                  </a:lnTo>
+                  <a:lnTo>
+                    <a:pt x="3509503" y="2965251"/>
+                  </a:lnTo>
+                  <a:lnTo>
+                    <a:pt x="3437881" y="2920077"/>
+                  </a:lnTo>
+                  <a:lnTo>
+                    <a:pt x="3366258" y="2870966"/>
+                  </a:lnTo>
+                  <a:lnTo>
+                    <a:pt x="3294636" y="2817576"/>
+                  </a:lnTo>
+                  <a:lnTo>
+                    <a:pt x="3223013" y="2759535"/>
+                  </a:lnTo>
+                  <a:lnTo>
+                    <a:pt x="3151391" y="2696437"/>
+                  </a:lnTo>
+                  <a:lnTo>
+                    <a:pt x="3079768" y="2659212"/>
+                  </a:lnTo>
+                  <a:lnTo>
+                    <a:pt x="3008146" y="2672190"/>
+                  </a:lnTo>
+                  <a:lnTo>
+                    <a:pt x="2936523" y="2684964"/>
+                  </a:lnTo>
+                  <a:lnTo>
+                    <a:pt x="2864901" y="2697537"/>
+                  </a:lnTo>
+                  <a:lnTo>
+                    <a:pt x="2793278" y="2709912"/>
+                  </a:lnTo>
+                  <a:lnTo>
+                    <a:pt x="2721655" y="2722093"/>
+                  </a:lnTo>
+                  <a:lnTo>
+                    <a:pt x="2650033" y="2734081"/>
+                  </a:lnTo>
+                  <a:lnTo>
+                    <a:pt x="2578410" y="2745881"/>
+                  </a:lnTo>
+                  <a:lnTo>
+                    <a:pt x="2506788" y="2757495"/>
+                  </a:lnTo>
+                  <a:lnTo>
+                    <a:pt x="2435165" y="2768927"/>
+                  </a:lnTo>
+                  <a:lnTo>
+                    <a:pt x="2363543" y="2780178"/>
+                  </a:lnTo>
+                  <a:lnTo>
+                    <a:pt x="2291920" y="2791253"/>
+                  </a:lnTo>
+                  <a:lnTo>
+                    <a:pt x="2220298" y="2802153"/>
+                  </a:lnTo>
+                  <a:lnTo>
+                    <a:pt x="2148675" y="2812881"/>
+                  </a:lnTo>
+                  <a:lnTo>
+                    <a:pt x="2077053" y="2823441"/>
+                  </a:lnTo>
+                  <a:lnTo>
+                    <a:pt x="2005430" y="2833834"/>
+                  </a:lnTo>
+                  <a:lnTo>
+                    <a:pt x="1933808" y="2844064"/>
+                  </a:lnTo>
+                  <a:lnTo>
+                    <a:pt x="1862185" y="2854133"/>
+                  </a:lnTo>
+                  <a:lnTo>
+                    <a:pt x="1790563" y="2864043"/>
+                  </a:lnTo>
+                  <a:lnTo>
+                    <a:pt x="1718940" y="2873797"/>
+                  </a:lnTo>
+                  <a:lnTo>
+                    <a:pt x="1647318" y="2883398"/>
+                  </a:lnTo>
+                  <a:lnTo>
+                    <a:pt x="1575695" y="2892848"/>
+                  </a:lnTo>
+                  <a:lnTo>
+                    <a:pt x="1504073" y="2902149"/>
+                  </a:lnTo>
+                  <a:lnTo>
+                    <a:pt x="1432450" y="2911303"/>
+                  </a:lnTo>
+                  <a:lnTo>
+                    <a:pt x="1360827" y="2920314"/>
+                  </a:lnTo>
+                  <a:lnTo>
+                    <a:pt x="1289205" y="2929182"/>
+                  </a:lnTo>
+                  <a:lnTo>
+                    <a:pt x="1217582" y="2937911"/>
+                  </a:lnTo>
+                  <a:lnTo>
+                    <a:pt x="1145960" y="2946503"/>
+                  </a:lnTo>
+                  <a:lnTo>
+                    <a:pt x="1074337" y="2954959"/>
+                  </a:lnTo>
+                  <a:lnTo>
+                    <a:pt x="1002715" y="2963282"/>
+                  </a:lnTo>
+                  <a:lnTo>
+                    <a:pt x="931092" y="2971475"/>
+                  </a:lnTo>
+                  <a:lnTo>
+                    <a:pt x="859470" y="2979538"/>
+                  </a:lnTo>
+                  <a:lnTo>
+                    <a:pt x="787847" y="2987474"/>
+                  </a:lnTo>
+                  <a:lnTo>
+                    <a:pt x="716225" y="2995286"/>
+                  </a:lnTo>
+                  <a:lnTo>
+                    <a:pt x="644602" y="3002974"/>
+                  </a:lnTo>
+                  <a:lnTo>
+                    <a:pt x="572980" y="3010542"/>
+                  </a:lnTo>
+                  <a:lnTo>
+                    <a:pt x="501357" y="3017990"/>
+                  </a:lnTo>
+                  <a:lnTo>
+                    <a:pt x="429735" y="3025321"/>
+                  </a:lnTo>
+                  <a:lnTo>
+                    <a:pt x="358112" y="3032537"/>
+                  </a:lnTo>
+                  <a:lnTo>
+                    <a:pt x="286490" y="3039639"/>
+                  </a:lnTo>
+                  <a:lnTo>
+                    <a:pt x="214867" y="3046629"/>
+                  </a:lnTo>
+                  <a:lnTo>
+                    <a:pt x="143245" y="3053510"/>
+                  </a:lnTo>
+                  <a:lnTo>
+                    <a:pt x="71622" y="3060282"/>
+                  </a:lnTo>
+                  <a:lnTo>
+                    <a:pt x="0" y="3066947"/>
                   </a:lnTo>
                   <a:close/>
                 </a:path>
@@ -3558,237 +3555,234 @@
           </p:nvSpPr>
           <p:spPr>
             <a:xfrm>
-              <a:off x="2987019" y="2073503"/>
-              <a:ext cx="5275660" cy="2651882"/>
+              <a:off x="3048812" y="2073503"/>
+              <a:ext cx="5213866" cy="2646026"/>
             </a:xfrm>
             <a:custGeom>
               <a:avLst/>
               <a:pathLst>
-                <a:path w="5275660" h="2651882">
+                <a:path w="5213866" h="2646026">
                   <a:moveTo>
                     <a:pt x="0" y="0"/>
                   </a:moveTo>
                   <a:lnTo>
-                    <a:pt x="47215" y="183691"/>
-                  </a:lnTo>
-                  <a:lnTo>
-                    <a:pt x="118838" y="440639"/>
-                  </a:lnTo>
-                  <a:lnTo>
-                    <a:pt x="190460" y="677582"/>
-                  </a:lnTo>
-                  <a:lnTo>
-                    <a:pt x="262083" y="896075"/>
-                  </a:lnTo>
-                  <a:lnTo>
-                    <a:pt x="333706" y="1097556"/>
-                  </a:lnTo>
-                  <a:lnTo>
-                    <a:pt x="405328" y="1283349"/>
-                  </a:lnTo>
-                  <a:lnTo>
-                    <a:pt x="476951" y="1454676"/>
-                  </a:lnTo>
-                  <a:lnTo>
-                    <a:pt x="548573" y="1612663"/>
-                  </a:lnTo>
-                  <a:lnTo>
-                    <a:pt x="620196" y="1758349"/>
-                  </a:lnTo>
-                  <a:lnTo>
-                    <a:pt x="691818" y="1892692"/>
-                  </a:lnTo>
-                  <a:lnTo>
-                    <a:pt x="763441" y="2016575"/>
-                  </a:lnTo>
-                  <a:lnTo>
-                    <a:pt x="835063" y="2130811"/>
-                  </a:lnTo>
-                  <a:lnTo>
-                    <a:pt x="906686" y="2236153"/>
-                  </a:lnTo>
-                  <a:lnTo>
-                    <a:pt x="978308" y="2333293"/>
-                  </a:lnTo>
-                  <a:lnTo>
-                    <a:pt x="1049931" y="2422870"/>
-                  </a:lnTo>
-                  <a:lnTo>
-                    <a:pt x="1121553" y="2505472"/>
-                  </a:lnTo>
-                  <a:lnTo>
-                    <a:pt x="1193176" y="2581642"/>
-                  </a:lnTo>
-                  <a:lnTo>
-                    <a:pt x="1264798" y="2651882"/>
-                  </a:lnTo>
-                  <a:lnTo>
-                    <a:pt x="1336421" y="2641917"/>
-                  </a:lnTo>
-                  <a:lnTo>
-                    <a:pt x="1408043" y="2628900"/>
-                  </a:lnTo>
-                  <a:lnTo>
-                    <a:pt x="1479666" y="2615681"/>
-                  </a:lnTo>
-                  <a:lnTo>
-                    <a:pt x="1551288" y="2602257"/>
-                  </a:lnTo>
-                  <a:lnTo>
-                    <a:pt x="1622911" y="2588626"/>
-                  </a:lnTo>
-                  <a:lnTo>
-                    <a:pt x="1694534" y="2574785"/>
-                  </a:lnTo>
-                  <a:lnTo>
-                    <a:pt x="1766156" y="2560729"/>
-                  </a:lnTo>
-                  <a:lnTo>
-                    <a:pt x="1837779" y="2546456"/>
-                  </a:lnTo>
-                  <a:lnTo>
-                    <a:pt x="1909401" y="2531962"/>
-                  </a:lnTo>
-                  <a:lnTo>
-                    <a:pt x="1981024" y="2517244"/>
-                  </a:lnTo>
-                  <a:lnTo>
-                    <a:pt x="2052646" y="2502298"/>
-                  </a:lnTo>
-                  <a:lnTo>
-                    <a:pt x="2124269" y="2487122"/>
-                  </a:lnTo>
-                  <a:lnTo>
-                    <a:pt x="2195891" y="2471711"/>
-                  </a:lnTo>
-                  <a:lnTo>
-                    <a:pt x="2267514" y="2456061"/>
-                  </a:lnTo>
-                  <a:lnTo>
-                    <a:pt x="2339136" y="2440169"/>
-                  </a:lnTo>
-                  <a:lnTo>
-                    <a:pt x="2410759" y="2424032"/>
-                  </a:lnTo>
-                  <a:lnTo>
-                    <a:pt x="2482381" y="2407645"/>
-                  </a:lnTo>
-                  <a:lnTo>
-                    <a:pt x="2554004" y="2391005"/>
-                  </a:lnTo>
-                  <a:lnTo>
-                    <a:pt x="2625626" y="2374107"/>
-                  </a:lnTo>
-                  <a:lnTo>
-                    <a:pt x="2697249" y="2356948"/>
-                  </a:lnTo>
-                  <a:lnTo>
-                    <a:pt x="2768871" y="2339524"/>
-                  </a:lnTo>
-                  <a:lnTo>
-                    <a:pt x="2840494" y="2321830"/>
-                  </a:lnTo>
-                  <a:lnTo>
-                    <a:pt x="2912116" y="2303863"/>
-                  </a:lnTo>
-                  <a:lnTo>
-                    <a:pt x="2983739" y="2285618"/>
-                  </a:lnTo>
-                  <a:lnTo>
-                    <a:pt x="3055362" y="2267090"/>
-                  </a:lnTo>
-                  <a:lnTo>
-                    <a:pt x="3126984" y="2248276"/>
-                  </a:lnTo>
-                  <a:lnTo>
-                    <a:pt x="3198607" y="2229172"/>
-                  </a:lnTo>
-                  <a:lnTo>
-                    <a:pt x="3270229" y="2209772"/>
-                  </a:lnTo>
-                  <a:lnTo>
-                    <a:pt x="3341852" y="2190071"/>
-                  </a:lnTo>
-                  <a:lnTo>
-                    <a:pt x="3413474" y="2170067"/>
-                  </a:lnTo>
-                  <a:lnTo>
-                    <a:pt x="3485097" y="2149753"/>
-                  </a:lnTo>
-                  <a:lnTo>
-                    <a:pt x="3556719" y="2129124"/>
-                  </a:lnTo>
-                  <a:lnTo>
-                    <a:pt x="3628342" y="2108177"/>
-                  </a:lnTo>
-                  <a:lnTo>
-                    <a:pt x="3699964" y="2086906"/>
-                  </a:lnTo>
-                  <a:lnTo>
-                    <a:pt x="3771587" y="2065306"/>
-                  </a:lnTo>
-                  <a:lnTo>
-                    <a:pt x="3843209" y="2043372"/>
-                  </a:lnTo>
-                  <a:lnTo>
-                    <a:pt x="3914832" y="2021098"/>
-                  </a:lnTo>
-                  <a:lnTo>
-                    <a:pt x="3986454" y="1998481"/>
-                  </a:lnTo>
-                  <a:lnTo>
-                    <a:pt x="4058077" y="1975513"/>
-                  </a:lnTo>
-                  <a:lnTo>
-                    <a:pt x="4129699" y="1952191"/>
-                  </a:lnTo>
-                  <a:lnTo>
-                    <a:pt x="4201322" y="1928507"/>
-                  </a:lnTo>
-                  <a:lnTo>
-                    <a:pt x="4272944" y="1904458"/>
-                  </a:lnTo>
-                  <a:lnTo>
-                    <a:pt x="4344567" y="1880037"/>
-                  </a:lnTo>
-                  <a:lnTo>
-                    <a:pt x="4416189" y="1855238"/>
-                  </a:lnTo>
-                  <a:lnTo>
-                    <a:pt x="4487812" y="1830055"/>
-                  </a:lnTo>
-                  <a:lnTo>
-                    <a:pt x="4559435" y="1804483"/>
-                  </a:lnTo>
-                  <a:lnTo>
-                    <a:pt x="4631057" y="1778516"/>
-                  </a:lnTo>
-                  <a:lnTo>
-                    <a:pt x="4702680" y="1752147"/>
-                  </a:lnTo>
-                  <a:lnTo>
-                    <a:pt x="4774302" y="1725370"/>
-                  </a:lnTo>
-                  <a:lnTo>
-                    <a:pt x="4845925" y="1698180"/>
-                  </a:lnTo>
-                  <a:lnTo>
-                    <a:pt x="4917547" y="1670568"/>
-                  </a:lnTo>
-                  <a:lnTo>
-                    <a:pt x="4989170" y="1642530"/>
-                  </a:lnTo>
-                  <a:lnTo>
-                    <a:pt x="5060792" y="1614059"/>
-                  </a:lnTo>
-                  <a:lnTo>
-                    <a:pt x="5132415" y="1585147"/>
-                  </a:lnTo>
-                  <a:lnTo>
-                    <a:pt x="5204037" y="1555788"/>
-                  </a:lnTo>
-                  <a:lnTo>
-                    <a:pt x="5275660" y="1525975"/>
+                    <a:pt x="57044" y="226061"/>
+                  </a:lnTo>
+                  <a:lnTo>
+                    <a:pt x="128667" y="487145"/>
+                  </a:lnTo>
+                  <a:lnTo>
+                    <a:pt x="200289" y="727305"/>
+                  </a:lnTo>
+                  <a:lnTo>
+                    <a:pt x="271912" y="948218"/>
+                  </a:lnTo>
+                  <a:lnTo>
+                    <a:pt x="343534" y="1151425"/>
+                  </a:lnTo>
+                  <a:lnTo>
+                    <a:pt x="415157" y="1338347"/>
+                  </a:lnTo>
+                  <a:lnTo>
+                    <a:pt x="486779" y="1510288"/>
+                  </a:lnTo>
+                  <a:lnTo>
+                    <a:pt x="558402" y="1668449"/>
+                  </a:lnTo>
+                  <a:lnTo>
+                    <a:pt x="630024" y="1813935"/>
+                  </a:lnTo>
+                  <a:lnTo>
+                    <a:pt x="701647" y="1947760"/>
+                  </a:lnTo>
+                  <a:lnTo>
+                    <a:pt x="773269" y="2070861"/>
+                  </a:lnTo>
+                  <a:lnTo>
+                    <a:pt x="844892" y="2184095"/>
+                  </a:lnTo>
+                  <a:lnTo>
+                    <a:pt x="916514" y="2288254"/>
+                  </a:lnTo>
+                  <a:lnTo>
+                    <a:pt x="988137" y="2384066"/>
+                  </a:lnTo>
+                  <a:lnTo>
+                    <a:pt x="1059759" y="2472199"/>
+                  </a:lnTo>
+                  <a:lnTo>
+                    <a:pt x="1131382" y="2553269"/>
+                  </a:lnTo>
+                  <a:lnTo>
+                    <a:pt x="1203005" y="2627841"/>
+                  </a:lnTo>
+                  <a:lnTo>
+                    <a:pt x="1274627" y="2646026"/>
+                  </a:lnTo>
+                  <a:lnTo>
+                    <a:pt x="1346250" y="2632629"/>
+                  </a:lnTo>
+                  <a:lnTo>
+                    <a:pt x="1417872" y="2619018"/>
+                  </a:lnTo>
+                  <a:lnTo>
+                    <a:pt x="1489495" y="2605189"/>
+                  </a:lnTo>
+                  <a:lnTo>
+                    <a:pt x="1561117" y="2591139"/>
+                  </a:lnTo>
+                  <a:lnTo>
+                    <a:pt x="1632740" y="2576865"/>
+                  </a:lnTo>
+                  <a:lnTo>
+                    <a:pt x="1704362" y="2562362"/>
+                  </a:lnTo>
+                  <a:lnTo>
+                    <a:pt x="1775985" y="2547627"/>
+                  </a:lnTo>
+                  <a:lnTo>
+                    <a:pt x="1847607" y="2532657"/>
+                  </a:lnTo>
+                  <a:lnTo>
+                    <a:pt x="1919230" y="2517447"/>
+                  </a:lnTo>
+                  <a:lnTo>
+                    <a:pt x="1990852" y="2501994"/>
+                  </a:lnTo>
+                  <a:lnTo>
+                    <a:pt x="2062475" y="2486294"/>
+                  </a:lnTo>
+                  <a:lnTo>
+                    <a:pt x="2134097" y="2470342"/>
+                  </a:lnTo>
+                  <a:lnTo>
+                    <a:pt x="2205720" y="2454136"/>
+                  </a:lnTo>
+                  <a:lnTo>
+                    <a:pt x="2277342" y="2437670"/>
+                  </a:lnTo>
+                  <a:lnTo>
+                    <a:pt x="2348965" y="2420942"/>
+                  </a:lnTo>
+                  <a:lnTo>
+                    <a:pt x="2420587" y="2403945"/>
+                  </a:lnTo>
+                  <a:lnTo>
+                    <a:pt x="2492210" y="2386677"/>
+                  </a:lnTo>
+                  <a:lnTo>
+                    <a:pt x="2563833" y="2369133"/>
+                  </a:lnTo>
+                  <a:lnTo>
+                    <a:pt x="2635455" y="2351308"/>
+                  </a:lnTo>
+                  <a:lnTo>
+                    <a:pt x="2707078" y="2333198"/>
+                  </a:lnTo>
+                  <a:lnTo>
+                    <a:pt x="2778700" y="2314798"/>
+                  </a:lnTo>
+                  <a:lnTo>
+                    <a:pt x="2850323" y="2296105"/>
+                  </a:lnTo>
+                  <a:lnTo>
+                    <a:pt x="2921945" y="2277112"/>
+                  </a:lnTo>
+                  <a:lnTo>
+                    <a:pt x="2993568" y="2257815"/>
+                  </a:lnTo>
+                  <a:lnTo>
+                    <a:pt x="3065190" y="2238210"/>
+                  </a:lnTo>
+                  <a:lnTo>
+                    <a:pt x="3136813" y="2218292"/>
+                  </a:lnTo>
+                  <a:lnTo>
+                    <a:pt x="3208435" y="2198054"/>
+                  </a:lnTo>
+                  <a:lnTo>
+                    <a:pt x="3280058" y="2177494"/>
+                  </a:lnTo>
+                  <a:lnTo>
+                    <a:pt x="3351680" y="2156604"/>
+                  </a:lnTo>
+                  <a:lnTo>
+                    <a:pt x="3423303" y="2135380"/>
+                  </a:lnTo>
+                  <a:lnTo>
+                    <a:pt x="3494925" y="2113817"/>
+                  </a:lnTo>
+                  <a:lnTo>
+                    <a:pt x="3566548" y="2091910"/>
+                  </a:lnTo>
+                  <a:lnTo>
+                    <a:pt x="3638170" y="2069651"/>
+                  </a:lnTo>
+                  <a:lnTo>
+                    <a:pt x="3709793" y="2047037"/>
+                  </a:lnTo>
+                  <a:lnTo>
+                    <a:pt x="3781415" y="2024061"/>
+                  </a:lnTo>
+                  <a:lnTo>
+                    <a:pt x="3853038" y="2000718"/>
+                  </a:lnTo>
+                  <a:lnTo>
+                    <a:pt x="3924661" y="1977001"/>
+                  </a:lnTo>
+                  <a:lnTo>
+                    <a:pt x="3996283" y="1952906"/>
+                  </a:lnTo>
+                  <a:lnTo>
+                    <a:pt x="4067906" y="1928424"/>
+                  </a:lnTo>
+                  <a:lnTo>
+                    <a:pt x="4139528" y="1903552"/>
+                  </a:lnTo>
+                  <a:lnTo>
+                    <a:pt x="4211151" y="1878281"/>
+                  </a:lnTo>
+                  <a:lnTo>
+                    <a:pt x="4282773" y="1852607"/>
+                  </a:lnTo>
+                  <a:lnTo>
+                    <a:pt x="4354396" y="1826521"/>
+                  </a:lnTo>
+                  <a:lnTo>
+                    <a:pt x="4426018" y="1800019"/>
+                  </a:lnTo>
+                  <a:lnTo>
+                    <a:pt x="4497641" y="1773093"/>
+                  </a:lnTo>
+                  <a:lnTo>
+                    <a:pt x="4569263" y="1745736"/>
+                  </a:lnTo>
+                  <a:lnTo>
+                    <a:pt x="4640886" y="1717942"/>
+                  </a:lnTo>
+                  <a:lnTo>
+                    <a:pt x="4712508" y="1689703"/>
+                  </a:lnTo>
+                  <a:lnTo>
+                    <a:pt x="4784131" y="1661013"/>
+                  </a:lnTo>
+                  <a:lnTo>
+                    <a:pt x="4855753" y="1631864"/>
+                  </a:lnTo>
+                  <a:lnTo>
+                    <a:pt x="4927376" y="1602249"/>
+                  </a:lnTo>
+                  <a:lnTo>
+                    <a:pt x="4998998" y="1572160"/>
+                  </a:lnTo>
+                  <a:lnTo>
+                    <a:pt x="5070621" y="1541590"/>
+                  </a:lnTo>
+                  <a:lnTo>
+                    <a:pt x="5142243" y="1510531"/>
+                  </a:lnTo>
+                  <a:lnTo>
+                    <a:pt x="5213866" y="1478975"/>
                   </a:lnTo>
                 </a:path>
               </a:pathLst>
@@ -3808,312 +3802,312 @@
           </p:nvSpPr>
           <p:spPr>
             <a:xfrm>
-              <a:off x="1172049" y="4728240"/>
-              <a:ext cx="7090630" cy="820125"/>
+              <a:off x="1172049" y="4732715"/>
+              <a:ext cx="7090630" cy="816578"/>
             </a:xfrm>
             <a:custGeom>
               <a:avLst/>
               <a:pathLst>
-                <a:path w="7090630" h="820125">
+                <a:path w="7090630" h="816578">
                   <a:moveTo>
-                    <a:pt x="7090630" y="820125"/>
+                    <a:pt x="7090630" y="816578"/>
                   </a:moveTo>
                   <a:lnTo>
-                    <a:pt x="7019007" y="819375"/>
-                  </a:lnTo>
-                  <a:lnTo>
-                    <a:pt x="6947385" y="818561"/>
-                  </a:lnTo>
-                  <a:lnTo>
-                    <a:pt x="6875762" y="817679"/>
-                  </a:lnTo>
-                  <a:lnTo>
-                    <a:pt x="6804139" y="816722"/>
-                  </a:lnTo>
-                  <a:lnTo>
-                    <a:pt x="6732517" y="815685"/>
-                  </a:lnTo>
-                  <a:lnTo>
-                    <a:pt x="6660894" y="814560"/>
-                  </a:lnTo>
-                  <a:lnTo>
-                    <a:pt x="6589272" y="813340"/>
-                  </a:lnTo>
-                  <a:lnTo>
-                    <a:pt x="6517649" y="812017"/>
-                  </a:lnTo>
-                  <a:lnTo>
-                    <a:pt x="6446027" y="810582"/>
-                  </a:lnTo>
-                  <a:lnTo>
-                    <a:pt x="6374404" y="809026"/>
-                  </a:lnTo>
-                  <a:lnTo>
-                    <a:pt x="6302782" y="807339"/>
-                  </a:lnTo>
-                  <a:lnTo>
-                    <a:pt x="6231159" y="805509"/>
-                  </a:lnTo>
-                  <a:lnTo>
-                    <a:pt x="6159537" y="803525"/>
-                  </a:lnTo>
-                  <a:lnTo>
-                    <a:pt x="6087914" y="801373"/>
-                  </a:lnTo>
-                  <a:lnTo>
-                    <a:pt x="6016292" y="799039"/>
-                  </a:lnTo>
-                  <a:lnTo>
-                    <a:pt x="5944669" y="796509"/>
-                  </a:lnTo>
-                  <a:lnTo>
-                    <a:pt x="5873047" y="793764"/>
-                  </a:lnTo>
-                  <a:lnTo>
-                    <a:pt x="5801424" y="790788"/>
-                  </a:lnTo>
-                  <a:lnTo>
-                    <a:pt x="5729802" y="787561"/>
-                  </a:lnTo>
-                  <a:lnTo>
-                    <a:pt x="5658179" y="784062"/>
-                  </a:lnTo>
-                  <a:lnTo>
-                    <a:pt x="5586557" y="780266"/>
-                  </a:lnTo>
-                  <a:lnTo>
-                    <a:pt x="5514934" y="776151"/>
-                  </a:lnTo>
-                  <a:lnTo>
-                    <a:pt x="5443311" y="771687"/>
-                  </a:lnTo>
-                  <a:lnTo>
-                    <a:pt x="5371689" y="766847"/>
-                  </a:lnTo>
-                  <a:lnTo>
-                    <a:pt x="5300066" y="761599"/>
-                  </a:lnTo>
-                  <a:lnTo>
-                    <a:pt x="5228444" y="755907"/>
-                  </a:lnTo>
-                  <a:lnTo>
-                    <a:pt x="5156821" y="749734"/>
-                  </a:lnTo>
-                  <a:lnTo>
-                    <a:pt x="5085199" y="743041"/>
-                  </a:lnTo>
-                  <a:lnTo>
-                    <a:pt x="5013576" y="735782"/>
-                  </a:lnTo>
-                  <a:lnTo>
-                    <a:pt x="4941954" y="727910"/>
-                  </a:lnTo>
-                  <a:lnTo>
-                    <a:pt x="4870331" y="719374"/>
-                  </a:lnTo>
-                  <a:lnTo>
-                    <a:pt x="4798709" y="710116"/>
-                  </a:lnTo>
-                  <a:lnTo>
-                    <a:pt x="4727086" y="700077"/>
-                  </a:lnTo>
-                  <a:lnTo>
-                    <a:pt x="4655464" y="689191"/>
-                  </a:lnTo>
-                  <a:lnTo>
-                    <a:pt x="4583841" y="677385"/>
-                  </a:lnTo>
-                  <a:lnTo>
-                    <a:pt x="4512219" y="664583"/>
-                  </a:lnTo>
-                  <a:lnTo>
-                    <a:pt x="4440596" y="650699"/>
-                  </a:lnTo>
-                  <a:lnTo>
-                    <a:pt x="4368974" y="635643"/>
-                  </a:lnTo>
-                  <a:lnTo>
-                    <a:pt x="4297351" y="619316"/>
-                  </a:lnTo>
-                  <a:lnTo>
-                    <a:pt x="4225729" y="601610"/>
-                  </a:lnTo>
-                  <a:lnTo>
-                    <a:pt x="4154106" y="582410"/>
-                  </a:lnTo>
-                  <a:lnTo>
-                    <a:pt x="4082483" y="561588"/>
-                  </a:lnTo>
-                  <a:lnTo>
-                    <a:pt x="4010861" y="539008"/>
-                  </a:lnTo>
-                  <a:lnTo>
-                    <a:pt x="3939238" y="514521"/>
-                  </a:lnTo>
-                  <a:lnTo>
-                    <a:pt x="3867616" y="487967"/>
-                  </a:lnTo>
-                  <a:lnTo>
-                    <a:pt x="3795993" y="459170"/>
-                  </a:lnTo>
-                  <a:lnTo>
-                    <a:pt x="3724371" y="427943"/>
-                  </a:lnTo>
-                  <a:lnTo>
-                    <a:pt x="3652748" y="394078"/>
-                  </a:lnTo>
-                  <a:lnTo>
-                    <a:pt x="3581126" y="357354"/>
-                  </a:lnTo>
-                  <a:lnTo>
-                    <a:pt x="3509503" y="317529"/>
-                  </a:lnTo>
-                  <a:lnTo>
-                    <a:pt x="3437881" y="274342"/>
-                  </a:lnTo>
-                  <a:lnTo>
-                    <a:pt x="3366258" y="227508"/>
-                  </a:lnTo>
-                  <a:lnTo>
-                    <a:pt x="3294636" y="176719"/>
-                  </a:lnTo>
-                  <a:lnTo>
-                    <a:pt x="3223013" y="121642"/>
-                  </a:lnTo>
-                  <a:lnTo>
-                    <a:pt x="3151391" y="61915"/>
+                    <a:pt x="7019007" y="815884"/>
+                  </a:lnTo>
+                  <a:lnTo>
+                    <a:pt x="6947385" y="815131"/>
+                  </a:lnTo>
+                  <a:lnTo>
+                    <a:pt x="6875762" y="814311"/>
+                  </a:lnTo>
+                  <a:lnTo>
+                    <a:pt x="6804139" y="813421"/>
+                  </a:lnTo>
+                  <a:lnTo>
+                    <a:pt x="6732517" y="812452"/>
+                  </a:lnTo>
+                  <a:lnTo>
+                    <a:pt x="6660894" y="811400"/>
+                  </a:lnTo>
+                  <a:lnTo>
+                    <a:pt x="6589272" y="810255"/>
+                  </a:lnTo>
+                  <a:lnTo>
+                    <a:pt x="6517649" y="809011"/>
+                  </a:lnTo>
+                  <a:lnTo>
+                    <a:pt x="6446027" y="807659"/>
+                  </a:lnTo>
+                  <a:lnTo>
+                    <a:pt x="6374404" y="806189"/>
+                  </a:lnTo>
+                  <a:lnTo>
+                    <a:pt x="6302782" y="804590"/>
+                  </a:lnTo>
+                  <a:lnTo>
+                    <a:pt x="6231159" y="802852"/>
+                  </a:lnTo>
+                  <a:lnTo>
+                    <a:pt x="6159537" y="800963"/>
+                  </a:lnTo>
+                  <a:lnTo>
+                    <a:pt x="6087914" y="798910"/>
+                  </a:lnTo>
+                  <a:lnTo>
+                    <a:pt x="6016292" y="796677"/>
+                  </a:lnTo>
+                  <a:lnTo>
+                    <a:pt x="5944669" y="794250"/>
+                  </a:lnTo>
+                  <a:lnTo>
+                    <a:pt x="5873047" y="791611"/>
+                  </a:lnTo>
+                  <a:lnTo>
+                    <a:pt x="5801424" y="788743"/>
+                  </a:lnTo>
+                  <a:lnTo>
+                    <a:pt x="5729802" y="785625"/>
+                  </a:lnTo>
+                  <a:lnTo>
+                    <a:pt x="5658179" y="782235"/>
+                  </a:lnTo>
+                  <a:lnTo>
+                    <a:pt x="5586557" y="778549"/>
+                  </a:lnTo>
+                  <a:lnTo>
+                    <a:pt x="5514934" y="774543"/>
+                  </a:lnTo>
+                  <a:lnTo>
+                    <a:pt x="5443311" y="770187"/>
+                  </a:lnTo>
+                  <a:lnTo>
+                    <a:pt x="5371689" y="765452"/>
+                  </a:lnTo>
+                  <a:lnTo>
+                    <a:pt x="5300066" y="760304"/>
+                  </a:lnTo>
+                  <a:lnTo>
+                    <a:pt x="5228444" y="754708"/>
+                  </a:lnTo>
+                  <a:lnTo>
+                    <a:pt x="5156821" y="748624"/>
+                  </a:lnTo>
+                  <a:lnTo>
+                    <a:pt x="5085199" y="742010"/>
+                  </a:lnTo>
+                  <a:lnTo>
+                    <a:pt x="5013576" y="734820"/>
+                  </a:lnTo>
+                  <a:lnTo>
+                    <a:pt x="4941954" y="727004"/>
+                  </a:lnTo>
+                  <a:lnTo>
+                    <a:pt x="4870331" y="718506"/>
+                  </a:lnTo>
+                  <a:lnTo>
+                    <a:pt x="4798709" y="709268"/>
+                  </a:lnTo>
+                  <a:lnTo>
+                    <a:pt x="4727086" y="699226"/>
+                  </a:lnTo>
+                  <a:lnTo>
+                    <a:pt x="4655464" y="688308"/>
+                  </a:lnTo>
+                  <a:lnTo>
+                    <a:pt x="4583841" y="676439"/>
+                  </a:lnTo>
+                  <a:lnTo>
+                    <a:pt x="4512219" y="663536"/>
+                  </a:lnTo>
+                  <a:lnTo>
+                    <a:pt x="4440596" y="649509"/>
+                  </a:lnTo>
+                  <a:lnTo>
+                    <a:pt x="4368974" y="634259"/>
+                  </a:lnTo>
+                  <a:lnTo>
+                    <a:pt x="4297351" y="617681"/>
+                  </a:lnTo>
+                  <a:lnTo>
+                    <a:pt x="4225729" y="599659"/>
+                  </a:lnTo>
+                  <a:lnTo>
+                    <a:pt x="4154106" y="580066"/>
+                  </a:lnTo>
+                  <a:lnTo>
+                    <a:pt x="4082483" y="558766"/>
+                  </a:lnTo>
+                  <a:lnTo>
+                    <a:pt x="4010861" y="535611"/>
+                  </a:lnTo>
+                  <a:lnTo>
+                    <a:pt x="3939238" y="510438"/>
+                  </a:lnTo>
+                  <a:lnTo>
+                    <a:pt x="3867616" y="483071"/>
+                  </a:lnTo>
+                  <a:lnTo>
+                    <a:pt x="3795993" y="453321"/>
+                  </a:lnTo>
+                  <a:lnTo>
+                    <a:pt x="3724371" y="420978"/>
+                  </a:lnTo>
+                  <a:lnTo>
+                    <a:pt x="3652748" y="385818"/>
+                  </a:lnTo>
+                  <a:lnTo>
+                    <a:pt x="3581126" y="347594"/>
+                  </a:lnTo>
+                  <a:lnTo>
+                    <a:pt x="3509503" y="306039"/>
+                  </a:lnTo>
+                  <a:lnTo>
+                    <a:pt x="3437881" y="260864"/>
+                  </a:lnTo>
+                  <a:lnTo>
+                    <a:pt x="3366258" y="211754"/>
+                  </a:lnTo>
+                  <a:lnTo>
+                    <a:pt x="3294636" y="158364"/>
+                  </a:lnTo>
+                  <a:lnTo>
+                    <a:pt x="3223013" y="100323"/>
+                  </a:lnTo>
+                  <a:lnTo>
+                    <a:pt x="3151391" y="37225"/>
                   </a:lnTo>
                   <a:lnTo>
                     <a:pt x="3079768" y="0"/>
                   </a:lnTo>
                   <a:lnTo>
-                    <a:pt x="3008146" y="12624"/>
-                  </a:lnTo>
-                  <a:lnTo>
-                    <a:pt x="2936523" y="25056"/>
-                  </a:lnTo>
-                  <a:lnTo>
-                    <a:pt x="2864901" y="37298"/>
-                  </a:lnTo>
-                  <a:lnTo>
-                    <a:pt x="2793278" y="49355"/>
-                  </a:lnTo>
-                  <a:lnTo>
-                    <a:pt x="2721655" y="61227"/>
-                  </a:lnTo>
-                  <a:lnTo>
-                    <a:pt x="2650033" y="72919"/>
-                  </a:lnTo>
-                  <a:lnTo>
-                    <a:pt x="2578410" y="84433"/>
-                  </a:lnTo>
-                  <a:lnTo>
-                    <a:pt x="2506788" y="95771"/>
-                  </a:lnTo>
-                  <a:lnTo>
-                    <a:pt x="2435165" y="106937"/>
-                  </a:lnTo>
-                  <a:lnTo>
-                    <a:pt x="2363543" y="117933"/>
-                  </a:lnTo>
-                  <a:lnTo>
-                    <a:pt x="2291920" y="128761"/>
-                  </a:lnTo>
-                  <a:lnTo>
-                    <a:pt x="2220298" y="139424"/>
-                  </a:lnTo>
-                  <a:lnTo>
-                    <a:pt x="2148675" y="149925"/>
-                  </a:lnTo>
-                  <a:lnTo>
-                    <a:pt x="2077053" y="160267"/>
-                  </a:lnTo>
-                  <a:lnTo>
-                    <a:pt x="2005430" y="170450"/>
-                  </a:lnTo>
-                  <a:lnTo>
-                    <a:pt x="1933808" y="180479"/>
-                  </a:lnTo>
-                  <a:lnTo>
-                    <a:pt x="1862185" y="190355"/>
-                  </a:lnTo>
-                  <a:lnTo>
-                    <a:pt x="1790563" y="200080"/>
-                  </a:lnTo>
-                  <a:lnTo>
-                    <a:pt x="1718940" y="209657"/>
-                  </a:lnTo>
-                  <a:lnTo>
-                    <a:pt x="1647318" y="219089"/>
-                  </a:lnTo>
-                  <a:lnTo>
-                    <a:pt x="1575695" y="228377"/>
-                  </a:lnTo>
-                  <a:lnTo>
-                    <a:pt x="1504073" y="237523"/>
-                  </a:lnTo>
-                  <a:lnTo>
-                    <a:pt x="1432450" y="246531"/>
-                  </a:lnTo>
-                  <a:lnTo>
-                    <a:pt x="1360827" y="255401"/>
-                  </a:lnTo>
-                  <a:lnTo>
-                    <a:pt x="1289205" y="264135"/>
-                  </a:lnTo>
-                  <a:lnTo>
-                    <a:pt x="1217582" y="272737"/>
-                  </a:lnTo>
-                  <a:lnTo>
-                    <a:pt x="1145960" y="281208"/>
-                  </a:lnTo>
-                  <a:lnTo>
-                    <a:pt x="1074337" y="289550"/>
-                  </a:lnTo>
-                  <a:lnTo>
-                    <a:pt x="1002715" y="297765"/>
-                  </a:lnTo>
-                  <a:lnTo>
-                    <a:pt x="931092" y="305855"/>
-                  </a:lnTo>
-                  <a:lnTo>
-                    <a:pt x="859470" y="313822"/>
-                  </a:lnTo>
-                  <a:lnTo>
-                    <a:pt x="787847" y="321667"/>
-                  </a:lnTo>
-                  <a:lnTo>
-                    <a:pt x="716225" y="329393"/>
-                  </a:lnTo>
-                  <a:lnTo>
-                    <a:pt x="644602" y="337001"/>
-                  </a:lnTo>
-                  <a:lnTo>
-                    <a:pt x="572980" y="344493"/>
-                  </a:lnTo>
-                  <a:lnTo>
-                    <a:pt x="501357" y="351871"/>
-                  </a:lnTo>
-                  <a:lnTo>
-                    <a:pt x="429735" y="359137"/>
-                  </a:lnTo>
-                  <a:lnTo>
-                    <a:pt x="358112" y="366293"/>
-                  </a:lnTo>
-                  <a:lnTo>
-                    <a:pt x="286490" y="373339"/>
-                  </a:lnTo>
-                  <a:lnTo>
-                    <a:pt x="214867" y="380278"/>
-                  </a:lnTo>
-                  <a:lnTo>
-                    <a:pt x="143245" y="387111"/>
-                  </a:lnTo>
-                  <a:lnTo>
-                    <a:pt x="71622" y="393840"/>
-                  </a:lnTo>
-                  <a:lnTo>
-                    <a:pt x="0" y="400467"/>
+                    <a:pt x="3008146" y="12978"/>
+                  </a:lnTo>
+                  <a:lnTo>
+                    <a:pt x="2936523" y="25752"/>
+                  </a:lnTo>
+                  <a:lnTo>
+                    <a:pt x="2864901" y="38325"/>
+                  </a:lnTo>
+                  <a:lnTo>
+                    <a:pt x="2793278" y="50700"/>
+                  </a:lnTo>
+                  <a:lnTo>
+                    <a:pt x="2721655" y="62881"/>
+                  </a:lnTo>
+                  <a:lnTo>
+                    <a:pt x="2650033" y="74869"/>
+                  </a:lnTo>
+                  <a:lnTo>
+                    <a:pt x="2578410" y="86669"/>
+                  </a:lnTo>
+                  <a:lnTo>
+                    <a:pt x="2506788" y="98283"/>
+                  </a:lnTo>
+                  <a:lnTo>
+                    <a:pt x="2435165" y="109715"/>
+                  </a:lnTo>
+                  <a:lnTo>
+                    <a:pt x="2363543" y="120966"/>
+                  </a:lnTo>
+                  <a:lnTo>
+                    <a:pt x="2291920" y="132041"/>
+                  </a:lnTo>
+                  <a:lnTo>
+                    <a:pt x="2220298" y="142941"/>
+                  </a:lnTo>
+                  <a:lnTo>
+                    <a:pt x="2148675" y="153669"/>
+                  </a:lnTo>
+                  <a:lnTo>
+                    <a:pt x="2077053" y="164229"/>
+                  </a:lnTo>
+                  <a:lnTo>
+                    <a:pt x="2005430" y="174622"/>
+                  </a:lnTo>
+                  <a:lnTo>
+                    <a:pt x="1933808" y="184852"/>
+                  </a:lnTo>
+                  <a:lnTo>
+                    <a:pt x="1862185" y="194921"/>
+                  </a:lnTo>
+                  <a:lnTo>
+                    <a:pt x="1790563" y="204831"/>
+                  </a:lnTo>
+                  <a:lnTo>
+                    <a:pt x="1718940" y="214585"/>
+                  </a:lnTo>
+                  <a:lnTo>
+                    <a:pt x="1647318" y="224186"/>
+                  </a:lnTo>
+                  <a:lnTo>
+                    <a:pt x="1575695" y="233636"/>
+                  </a:lnTo>
+                  <a:lnTo>
+                    <a:pt x="1504073" y="242936"/>
+                  </a:lnTo>
+                  <a:lnTo>
+                    <a:pt x="1432450" y="252091"/>
+                  </a:lnTo>
+                  <a:lnTo>
+                    <a:pt x="1360827" y="261101"/>
+                  </a:lnTo>
+                  <a:lnTo>
+                    <a:pt x="1289205" y="269970"/>
+                  </a:lnTo>
+                  <a:lnTo>
+                    <a:pt x="1217582" y="278699"/>
+                  </a:lnTo>
+                  <a:lnTo>
+                    <a:pt x="1145960" y="287291"/>
+                  </a:lnTo>
+                  <a:lnTo>
+                    <a:pt x="1074337" y="295747"/>
+                  </a:lnTo>
+                  <a:lnTo>
+                    <a:pt x="1002715" y="304070"/>
+                  </a:lnTo>
+                  <a:lnTo>
+                    <a:pt x="931092" y="312262"/>
+                  </a:lnTo>
+                  <a:lnTo>
+                    <a:pt x="859470" y="320326"/>
+                  </a:lnTo>
+                  <a:lnTo>
+                    <a:pt x="787847" y="328262"/>
+                  </a:lnTo>
+                  <a:lnTo>
+                    <a:pt x="716225" y="336074"/>
+                  </a:lnTo>
+                  <a:lnTo>
+                    <a:pt x="644602" y="343762"/>
+                  </a:lnTo>
+                  <a:lnTo>
+                    <a:pt x="572980" y="351330"/>
+                  </a:lnTo>
+                  <a:lnTo>
+                    <a:pt x="501357" y="358778"/>
+                  </a:lnTo>
+                  <a:lnTo>
+                    <a:pt x="429735" y="366109"/>
+                  </a:lnTo>
+                  <a:lnTo>
+                    <a:pt x="358112" y="373325"/>
+                  </a:lnTo>
+                  <a:lnTo>
+                    <a:pt x="286490" y="380427"/>
+                  </a:lnTo>
+                  <a:lnTo>
+                    <a:pt x="214867" y="387417"/>
+                  </a:lnTo>
+                  <a:lnTo>
+                    <a:pt x="143245" y="394298"/>
+                  </a:lnTo>
+                  <a:lnTo>
+                    <a:pt x="71622" y="401070"/>
+                  </a:lnTo>
+                  <a:lnTo>
+                    <a:pt x="0" y="407735"/>
                   </a:lnTo>
                 </a:path>
               </a:pathLst>
@@ -4133,312 +4127,312 @@
           </p:nvSpPr>
           <p:spPr>
             <a:xfrm>
-              <a:off x="1172049" y="2146029"/>
-              <a:ext cx="7090630" cy="3279335"/>
+              <a:off x="1241079" y="2073503"/>
+              <a:ext cx="7021600" cy="3357448"/>
             </a:xfrm>
             <a:custGeom>
               <a:avLst/>
               <a:pathLst>
-                <a:path w="7090630" h="3279335">
+                <a:path w="7021600" h="3357448">
                   <a:moveTo>
                     <a:pt x="0" y="0"/>
                   </a:moveTo>
                   <a:lnTo>
-                    <a:pt x="71622" y="110262"/>
-                  </a:lnTo>
-                  <a:lnTo>
-                    <a:pt x="143245" y="216961"/>
-                  </a:lnTo>
-                  <a:lnTo>
-                    <a:pt x="214867" y="320211"/>
-                  </a:lnTo>
-                  <a:lnTo>
-                    <a:pt x="286490" y="420124"/>
-                  </a:lnTo>
-                  <a:lnTo>
-                    <a:pt x="358112" y="516807"/>
-                  </a:lnTo>
-                  <a:lnTo>
-                    <a:pt x="429735" y="610364"/>
-                  </a:lnTo>
-                  <a:lnTo>
-                    <a:pt x="501357" y="700898"/>
-                  </a:lnTo>
-                  <a:lnTo>
-                    <a:pt x="572980" y="788506"/>
-                  </a:lnTo>
-                  <a:lnTo>
-                    <a:pt x="644602" y="873281"/>
-                  </a:lnTo>
-                  <a:lnTo>
-                    <a:pt x="716225" y="955316"/>
-                  </a:lnTo>
-                  <a:lnTo>
-                    <a:pt x="787847" y="1034700"/>
-                  </a:lnTo>
-                  <a:lnTo>
-                    <a:pt x="859470" y="1111518"/>
-                  </a:lnTo>
-                  <a:lnTo>
-                    <a:pt x="931092" y="1185852"/>
-                  </a:lnTo>
-                  <a:lnTo>
-                    <a:pt x="1002715" y="1257784"/>
-                  </a:lnTo>
-                  <a:lnTo>
-                    <a:pt x="1074337" y="1327391"/>
-                  </a:lnTo>
-                  <a:lnTo>
-                    <a:pt x="1145960" y="1394748"/>
-                  </a:lnTo>
-                  <a:lnTo>
-                    <a:pt x="1217582" y="1459927"/>
-                  </a:lnTo>
-                  <a:lnTo>
-                    <a:pt x="1289205" y="1523000"/>
-                  </a:lnTo>
-                  <a:lnTo>
-                    <a:pt x="1360827" y="1584034"/>
-                  </a:lnTo>
-                  <a:lnTo>
-                    <a:pt x="1432450" y="1643095"/>
-                  </a:lnTo>
-                  <a:lnTo>
-                    <a:pt x="1504073" y="1700248"/>
-                  </a:lnTo>
-                  <a:lnTo>
-                    <a:pt x="1575695" y="1755552"/>
-                  </a:lnTo>
-                  <a:lnTo>
-                    <a:pt x="1647318" y="1809069"/>
-                  </a:lnTo>
-                  <a:lnTo>
-                    <a:pt x="1718940" y="1860857"/>
-                  </a:lnTo>
-                  <a:lnTo>
-                    <a:pt x="1790563" y="1910970"/>
-                  </a:lnTo>
-                  <a:lnTo>
-                    <a:pt x="1862185" y="1959464"/>
-                  </a:lnTo>
-                  <a:lnTo>
-                    <a:pt x="1933808" y="2006389"/>
-                  </a:lnTo>
-                  <a:lnTo>
-                    <a:pt x="2005430" y="2051799"/>
-                  </a:lnTo>
-                  <a:lnTo>
-                    <a:pt x="2077053" y="2095740"/>
-                  </a:lnTo>
-                  <a:lnTo>
-                    <a:pt x="2148675" y="2138261"/>
-                  </a:lnTo>
-                  <a:lnTo>
-                    <a:pt x="2220298" y="2179408"/>
-                  </a:lnTo>
-                  <a:lnTo>
-                    <a:pt x="2291920" y="2219224"/>
-                  </a:lnTo>
-                  <a:lnTo>
-                    <a:pt x="2363543" y="2257754"/>
-                  </a:lnTo>
-                  <a:lnTo>
-                    <a:pt x="2435165" y="2295038"/>
-                  </a:lnTo>
-                  <a:lnTo>
-                    <a:pt x="2506788" y="2331117"/>
-                  </a:lnTo>
-                  <a:lnTo>
-                    <a:pt x="2578410" y="2366030"/>
-                  </a:lnTo>
-                  <a:lnTo>
-                    <a:pt x="2650033" y="2399814"/>
-                  </a:lnTo>
-                  <a:lnTo>
-                    <a:pt x="2721655" y="2432506"/>
-                  </a:lnTo>
-                  <a:lnTo>
-                    <a:pt x="2793278" y="2464142"/>
-                  </a:lnTo>
-                  <a:lnTo>
-                    <a:pt x="2864901" y="2494755"/>
-                  </a:lnTo>
-                  <a:lnTo>
-                    <a:pt x="2936523" y="2524378"/>
-                  </a:lnTo>
-                  <a:lnTo>
-                    <a:pt x="3008146" y="2553044"/>
-                  </a:lnTo>
-                  <a:lnTo>
-                    <a:pt x="3079768" y="2580783"/>
-                  </a:lnTo>
-                  <a:lnTo>
-                    <a:pt x="3151391" y="2607626"/>
-                  </a:lnTo>
-                  <a:lnTo>
-                    <a:pt x="3223013" y="2633601"/>
-                  </a:lnTo>
-                  <a:lnTo>
-                    <a:pt x="3294636" y="2658737"/>
-                  </a:lnTo>
-                  <a:lnTo>
-                    <a:pt x="3366258" y="2683060"/>
-                  </a:lnTo>
-                  <a:lnTo>
-                    <a:pt x="3437881" y="2706596"/>
-                  </a:lnTo>
-                  <a:lnTo>
-                    <a:pt x="3509503" y="2729372"/>
-                  </a:lnTo>
-                  <a:lnTo>
-                    <a:pt x="3581126" y="2751412"/>
-                  </a:lnTo>
-                  <a:lnTo>
-                    <a:pt x="3652748" y="2772739"/>
-                  </a:lnTo>
-                  <a:lnTo>
-                    <a:pt x="3724371" y="2793377"/>
-                  </a:lnTo>
-                  <a:lnTo>
-                    <a:pt x="3795993" y="2813348"/>
-                  </a:lnTo>
-                  <a:lnTo>
-                    <a:pt x="3867616" y="2832674"/>
-                  </a:lnTo>
-                  <a:lnTo>
-                    <a:pt x="3939238" y="2851374"/>
-                  </a:lnTo>
-                  <a:lnTo>
-                    <a:pt x="4010861" y="2869471"/>
-                  </a:lnTo>
-                  <a:lnTo>
-                    <a:pt x="4082483" y="2886982"/>
-                  </a:lnTo>
-                  <a:lnTo>
-                    <a:pt x="4154106" y="2903927"/>
-                  </a:lnTo>
-                  <a:lnTo>
-                    <a:pt x="4225729" y="2920325"/>
-                  </a:lnTo>
-                  <a:lnTo>
-                    <a:pt x="4297351" y="2936192"/>
-                  </a:lnTo>
-                  <a:lnTo>
-                    <a:pt x="4368974" y="2951547"/>
-                  </a:lnTo>
-                  <a:lnTo>
-                    <a:pt x="4440596" y="2966405"/>
-                  </a:lnTo>
-                  <a:lnTo>
-                    <a:pt x="4512219" y="2980783"/>
-                  </a:lnTo>
-                  <a:lnTo>
-                    <a:pt x="4583841" y="2994696"/>
-                  </a:lnTo>
-                  <a:lnTo>
-                    <a:pt x="4655464" y="3008160"/>
-                  </a:lnTo>
-                  <a:lnTo>
-                    <a:pt x="4727086" y="3021188"/>
-                  </a:lnTo>
-                  <a:lnTo>
-                    <a:pt x="4798709" y="3033795"/>
-                  </a:lnTo>
-                  <a:lnTo>
-                    <a:pt x="4870331" y="3045995"/>
-                  </a:lnTo>
-                  <a:lnTo>
-                    <a:pt x="4941954" y="3057800"/>
-                  </a:lnTo>
-                  <a:lnTo>
-                    <a:pt x="5013576" y="3069224"/>
-                  </a:lnTo>
-                  <a:lnTo>
-                    <a:pt x="5085199" y="3080279"/>
-                  </a:lnTo>
-                  <a:lnTo>
-                    <a:pt x="5156821" y="3090976"/>
-                  </a:lnTo>
-                  <a:lnTo>
-                    <a:pt x="5228444" y="3101327"/>
-                  </a:lnTo>
-                  <a:lnTo>
-                    <a:pt x="5300066" y="3111344"/>
-                  </a:lnTo>
-                  <a:lnTo>
-                    <a:pt x="5371689" y="3121037"/>
-                  </a:lnTo>
-                  <a:lnTo>
-                    <a:pt x="5443311" y="3130417"/>
-                  </a:lnTo>
-                  <a:lnTo>
-                    <a:pt x="5514934" y="3139493"/>
-                  </a:lnTo>
-                  <a:lnTo>
-                    <a:pt x="5586557" y="3148277"/>
-                  </a:lnTo>
-                  <a:lnTo>
-                    <a:pt x="5658179" y="3156776"/>
-                  </a:lnTo>
-                  <a:lnTo>
-                    <a:pt x="5729802" y="3165000"/>
-                  </a:lnTo>
-                  <a:lnTo>
-                    <a:pt x="5801424" y="3172959"/>
-                  </a:lnTo>
-                  <a:lnTo>
-                    <a:pt x="5873047" y="3180661"/>
-                  </a:lnTo>
-                  <a:lnTo>
-                    <a:pt x="5944669" y="3188113"/>
-                  </a:lnTo>
-                  <a:lnTo>
-                    <a:pt x="6016292" y="3195325"/>
-                  </a:lnTo>
-                  <a:lnTo>
-                    <a:pt x="6087914" y="3202303"/>
-                  </a:lnTo>
-                  <a:lnTo>
-                    <a:pt x="6159537" y="3209056"/>
-                  </a:lnTo>
-                  <a:lnTo>
-                    <a:pt x="6231159" y="3215591"/>
-                  </a:lnTo>
-                  <a:lnTo>
-                    <a:pt x="6302782" y="3221914"/>
-                  </a:lnTo>
-                  <a:lnTo>
-                    <a:pt x="6374404" y="3228033"/>
-                  </a:lnTo>
-                  <a:lnTo>
-                    <a:pt x="6446027" y="3233954"/>
-                  </a:lnTo>
-                  <a:lnTo>
-                    <a:pt x="6517649" y="3239684"/>
-                  </a:lnTo>
-                  <a:lnTo>
-                    <a:pt x="6589272" y="3245229"/>
-                  </a:lnTo>
-                  <a:lnTo>
-                    <a:pt x="6660894" y="3250594"/>
-                  </a:lnTo>
-                  <a:lnTo>
-                    <a:pt x="6732517" y="3255786"/>
-                  </a:lnTo>
-                  <a:lnTo>
-                    <a:pt x="6804139" y="3260810"/>
-                  </a:lnTo>
-                  <a:lnTo>
-                    <a:pt x="6875762" y="3265672"/>
-                  </a:lnTo>
-                  <a:lnTo>
-                    <a:pt x="6947385" y="3270377"/>
-                  </a:lnTo>
-                  <a:lnTo>
-                    <a:pt x="7019007" y="3274929"/>
-                  </a:lnTo>
-                  <a:lnTo>
-                    <a:pt x="7090630" y="3279335"/>
+                    <a:pt x="2592" y="4334"/>
+                  </a:lnTo>
+                  <a:lnTo>
+                    <a:pt x="74215" y="120096"/>
+                  </a:lnTo>
+                  <a:lnTo>
+                    <a:pt x="145837" y="232006"/>
+                  </a:lnTo>
+                  <a:lnTo>
+                    <a:pt x="217460" y="340192"/>
+                  </a:lnTo>
+                  <a:lnTo>
+                    <a:pt x="289082" y="444779"/>
+                  </a:lnTo>
+                  <a:lnTo>
+                    <a:pt x="360705" y="545887"/>
+                  </a:lnTo>
+                  <a:lnTo>
+                    <a:pt x="432327" y="643630"/>
+                  </a:lnTo>
+                  <a:lnTo>
+                    <a:pt x="503950" y="738122"/>
+                  </a:lnTo>
+                  <a:lnTo>
+                    <a:pt x="575573" y="829470"/>
+                  </a:lnTo>
+                  <a:lnTo>
+                    <a:pt x="647195" y="917779"/>
+                  </a:lnTo>
+                  <a:lnTo>
+                    <a:pt x="718818" y="1003149"/>
+                  </a:lnTo>
+                  <a:lnTo>
+                    <a:pt x="790440" y="1085680"/>
+                  </a:lnTo>
+                  <a:lnTo>
+                    <a:pt x="862063" y="1165464"/>
+                  </a:lnTo>
+                  <a:lnTo>
+                    <a:pt x="933685" y="1242594"/>
+                  </a:lnTo>
+                  <a:lnTo>
+                    <a:pt x="1005308" y="1317158"/>
+                  </a:lnTo>
+                  <a:lnTo>
+                    <a:pt x="1076930" y="1389241"/>
+                  </a:lnTo>
+                  <a:lnTo>
+                    <a:pt x="1148553" y="1458926"/>
+                  </a:lnTo>
+                  <a:lnTo>
+                    <a:pt x="1220175" y="1526293"/>
+                  </a:lnTo>
+                  <a:lnTo>
+                    <a:pt x="1291798" y="1591418"/>
+                  </a:lnTo>
+                  <a:lnTo>
+                    <a:pt x="1363420" y="1654376"/>
+                  </a:lnTo>
+                  <a:lnTo>
+                    <a:pt x="1435043" y="1715240"/>
+                  </a:lnTo>
+                  <a:lnTo>
+                    <a:pt x="1506665" y="1774079"/>
+                  </a:lnTo>
+                  <a:lnTo>
+                    <a:pt x="1578288" y="1830960"/>
+                  </a:lnTo>
+                  <a:lnTo>
+                    <a:pt x="1649910" y="1885949"/>
+                  </a:lnTo>
+                  <a:lnTo>
+                    <a:pt x="1721533" y="1939108"/>
+                  </a:lnTo>
+                  <a:lnTo>
+                    <a:pt x="1793155" y="1990499"/>
+                  </a:lnTo>
+                  <a:lnTo>
+                    <a:pt x="1864778" y="2040180"/>
+                  </a:lnTo>
+                  <a:lnTo>
+                    <a:pt x="1936401" y="2088208"/>
+                  </a:lnTo>
+                  <a:lnTo>
+                    <a:pt x="2008023" y="2134638"/>
+                  </a:lnTo>
+                  <a:lnTo>
+                    <a:pt x="2079646" y="2179523"/>
+                  </a:lnTo>
+                  <a:lnTo>
+                    <a:pt x="2151268" y="2222915"/>
+                  </a:lnTo>
+                  <a:lnTo>
+                    <a:pt x="2222891" y="2264863"/>
+                  </a:lnTo>
+                  <a:lnTo>
+                    <a:pt x="2294513" y="2305416"/>
+                  </a:lnTo>
+                  <a:lnTo>
+                    <a:pt x="2366136" y="2344620"/>
+                  </a:lnTo>
+                  <a:lnTo>
+                    <a:pt x="2437758" y="2382519"/>
+                  </a:lnTo>
+                  <a:lnTo>
+                    <a:pt x="2509381" y="2419157"/>
+                  </a:lnTo>
+                  <a:lnTo>
+                    <a:pt x="2581003" y="2454576"/>
+                  </a:lnTo>
+                  <a:lnTo>
+                    <a:pt x="2652626" y="2488817"/>
+                  </a:lnTo>
+                  <a:lnTo>
+                    <a:pt x="2724248" y="2521919"/>
+                  </a:lnTo>
+                  <a:lnTo>
+                    <a:pt x="2795871" y="2553919"/>
+                  </a:lnTo>
+                  <a:lnTo>
+                    <a:pt x="2867493" y="2584855"/>
+                  </a:lnTo>
+                  <a:lnTo>
+                    <a:pt x="2939116" y="2614761"/>
+                  </a:lnTo>
+                  <a:lnTo>
+                    <a:pt x="3010738" y="2643673"/>
+                  </a:lnTo>
+                  <a:lnTo>
+                    <a:pt x="3082361" y="2671622"/>
+                  </a:lnTo>
+                  <a:lnTo>
+                    <a:pt x="3153983" y="2698642"/>
+                  </a:lnTo>
+                  <a:lnTo>
+                    <a:pt x="3225606" y="2724763"/>
+                  </a:lnTo>
+                  <a:lnTo>
+                    <a:pt x="3297229" y="2750014"/>
+                  </a:lnTo>
+                  <a:lnTo>
+                    <a:pt x="3368851" y="2774426"/>
+                  </a:lnTo>
+                  <a:lnTo>
+                    <a:pt x="3440474" y="2798025"/>
+                  </a:lnTo>
+                  <a:lnTo>
+                    <a:pt x="3512096" y="2820839"/>
+                  </a:lnTo>
+                  <a:lnTo>
+                    <a:pt x="3583719" y="2842894"/>
+                  </a:lnTo>
+                  <a:lnTo>
+                    <a:pt x="3655341" y="2864216"/>
+                  </a:lnTo>
+                  <a:lnTo>
+                    <a:pt x="3726964" y="2884828"/>
+                  </a:lnTo>
+                  <a:lnTo>
+                    <a:pt x="3798586" y="2904754"/>
+                  </a:lnTo>
+                  <a:lnTo>
+                    <a:pt x="3870209" y="2924017"/>
+                  </a:lnTo>
+                  <a:lnTo>
+                    <a:pt x="3941831" y="2942640"/>
+                  </a:lnTo>
+                  <a:lnTo>
+                    <a:pt x="4013454" y="2960643"/>
+                  </a:lnTo>
+                  <a:lnTo>
+                    <a:pt x="4085076" y="2978046"/>
+                  </a:lnTo>
+                  <a:lnTo>
+                    <a:pt x="4156699" y="2994871"/>
+                  </a:lnTo>
+                  <a:lnTo>
+                    <a:pt x="4228321" y="3011136"/>
+                  </a:lnTo>
+                  <a:lnTo>
+                    <a:pt x="4299944" y="3026860"/>
+                  </a:lnTo>
+                  <a:lnTo>
+                    <a:pt x="4371566" y="3042061"/>
+                  </a:lnTo>
+                  <a:lnTo>
+                    <a:pt x="4443189" y="3056756"/>
+                  </a:lnTo>
+                  <a:lnTo>
+                    <a:pt x="4514811" y="3070962"/>
+                  </a:lnTo>
+                  <a:lnTo>
+                    <a:pt x="4586434" y="3084696"/>
+                  </a:lnTo>
+                  <a:lnTo>
+                    <a:pt x="4658057" y="3097972"/>
+                  </a:lnTo>
+                  <a:lnTo>
+                    <a:pt x="4729679" y="3110807"/>
+                  </a:lnTo>
+                  <a:lnTo>
+                    <a:pt x="4801302" y="3123215"/>
+                  </a:lnTo>
+                  <a:lnTo>
+                    <a:pt x="4872924" y="3135210"/>
+                  </a:lnTo>
+                  <a:lnTo>
+                    <a:pt x="4944547" y="3146806"/>
+                  </a:lnTo>
+                  <a:lnTo>
+                    <a:pt x="5016169" y="3158016"/>
+                  </a:lnTo>
+                  <a:lnTo>
+                    <a:pt x="5087792" y="3168853"/>
+                  </a:lnTo>
+                  <a:lnTo>
+                    <a:pt x="5159414" y="3179330"/>
+                  </a:lnTo>
+                  <a:lnTo>
+                    <a:pt x="5231037" y="3189458"/>
+                  </a:lnTo>
+                  <a:lnTo>
+                    <a:pt x="5302659" y="3199249"/>
+                  </a:lnTo>
+                  <a:lnTo>
+                    <a:pt x="5374282" y="3208714"/>
+                  </a:lnTo>
+                  <a:lnTo>
+                    <a:pt x="5445904" y="3217865"/>
+                  </a:lnTo>
+                  <a:lnTo>
+                    <a:pt x="5517527" y="3226711"/>
+                  </a:lnTo>
+                  <a:lnTo>
+                    <a:pt x="5589149" y="3235262"/>
+                  </a:lnTo>
+                  <a:lnTo>
+                    <a:pt x="5660772" y="3243529"/>
+                  </a:lnTo>
+                  <a:lnTo>
+                    <a:pt x="5732394" y="3251521"/>
+                  </a:lnTo>
+                  <a:lnTo>
+                    <a:pt x="5804017" y="3259248"/>
+                  </a:lnTo>
+                  <a:lnTo>
+                    <a:pt x="5875639" y="3266717"/>
+                  </a:lnTo>
+                  <a:lnTo>
+                    <a:pt x="5947262" y="3273937"/>
+                  </a:lnTo>
+                  <a:lnTo>
+                    <a:pt x="6018885" y="3280918"/>
+                  </a:lnTo>
+                  <a:lnTo>
+                    <a:pt x="6090507" y="3287666"/>
+                  </a:lnTo>
+                  <a:lnTo>
+                    <a:pt x="6162130" y="3294190"/>
+                  </a:lnTo>
+                  <a:lnTo>
+                    <a:pt x="6233752" y="3300496"/>
+                  </a:lnTo>
+                  <a:lnTo>
+                    <a:pt x="6305375" y="3306593"/>
+                  </a:lnTo>
+                  <a:lnTo>
+                    <a:pt x="6376997" y="3312487"/>
+                  </a:lnTo>
+                  <a:lnTo>
+                    <a:pt x="6448620" y="3318185"/>
+                  </a:lnTo>
+                  <a:lnTo>
+                    <a:pt x="6520242" y="3323693"/>
+                  </a:lnTo>
+                  <a:lnTo>
+                    <a:pt x="6591865" y="3329018"/>
+                  </a:lnTo>
+                  <a:lnTo>
+                    <a:pt x="6663487" y="3334166"/>
+                  </a:lnTo>
+                  <a:lnTo>
+                    <a:pt x="6735110" y="3339143"/>
+                  </a:lnTo>
+                  <a:lnTo>
+                    <a:pt x="6806732" y="3343954"/>
+                  </a:lnTo>
+                  <a:lnTo>
+                    <a:pt x="6878355" y="3348605"/>
+                  </a:lnTo>
+                  <a:lnTo>
+                    <a:pt x="6949977" y="3353101"/>
+                  </a:lnTo>
+                  <a:lnTo>
+                    <a:pt x="7021600" y="3357448"/>
                   </a:lnTo>
                 </a:path>
               </a:pathLst>
@@ -4510,7 +4504,7 @@
           </p:nvSpPr>
           <p:spPr>
             <a:xfrm>
-              <a:off x="4254372" y="2073503"/>
+              <a:off x="4278722" y="2073503"/>
               <a:ext cx="0" cy="3649639"/>
             </a:xfrm>
             <a:custGeom>
@@ -4783,7 +4777,7 @@
           </p:nvSpPr>
           <p:spPr>
             <a:xfrm>
-              <a:off x="2254916" y="5785772"/>
+              <a:off x="2255364" y="5785772"/>
               <a:ext cx="161574" cy="80101"/>
             </a:xfrm>
             <a:prstGeom prst="rect">
@@ -4829,7 +4823,7 @@
           </p:nvSpPr>
           <p:spPr>
             <a:xfrm>
-              <a:off x="4120281" y="5785772"/>
+              <a:off x="4120286" y="5785772"/>
               <a:ext cx="62179" cy="80101"/>
             </a:xfrm>
             <a:prstGeom prst="rect">
@@ -4875,7 +4869,7 @@
           </p:nvSpPr>
           <p:spPr>
             <a:xfrm>
-              <a:off x="5904858" y="5785772"/>
+              <a:off x="5904422" y="5785772"/>
               <a:ext cx="124358" cy="80101"/>
             </a:xfrm>
             <a:prstGeom prst="rect">
@@ -4921,7 +4915,7 @@
           </p:nvSpPr>
           <p:spPr>
             <a:xfrm>
-              <a:off x="7720525" y="5785772"/>
+              <a:off x="7719647" y="5785772"/>
               <a:ext cx="124358" cy="80101"/>
             </a:xfrm>
             <a:prstGeom prst="rect">
@@ -5092,7 +5086,7 @@
                   <a:latin typeface="Helvetica"/>
                   <a:cs typeface="Helvetica"/>
                 </a:rPr>
-                <a:t>subHR per 10 % decline: 1.52 (0.82-2.79), p_Bonf = 1.000 (n = 6)  |  per IQR decline (Δ = 26.4 %): 3.01 (0.60-15.14)  |  IQR: [-11.1, 15.3] %</a:t>
+                <a:t>subHR per 10 % decline: 1.54 (0.82-2.88), p_Bonf = 1.000 (n = 6)  |  per IQR decline (Δ = 26.4 %): 3.10 (0.59-16.38)  |  IQR: [-11.1, 15.4] %</a:t>
               </a:r>
             </a:p>
           </p:txBody>
